--- a/Coit11241 Cyber Security Technologies/peer programing/peer programing presentation.pptx
+++ b/Coit11241 Cyber Security Technologies/peer programing/peer programing presentation.pptx
@@ -5,11 +5,18 @@
     <p:sldMasterId id="2147483648" r:id="rId1"/>
   </p:sldMasterIdLst>
   <p:notesMasterIdLst>
-    <p:notesMasterId r:id="rId4"/>
+    <p:notesMasterId r:id="rId11"/>
   </p:notesMasterIdLst>
   <p:sldIdLst>
     <p:sldId id="256" r:id="rId2"/>
     <p:sldId id="257" r:id="rId3"/>
+    <p:sldId id="258" r:id="rId4"/>
+    <p:sldId id="260" r:id="rId5"/>
+    <p:sldId id="259" r:id="rId6"/>
+    <p:sldId id="261" r:id="rId7"/>
+    <p:sldId id="262" r:id="rId8"/>
+    <p:sldId id="263" r:id="rId9"/>
+    <p:sldId id="264" r:id="rId10"/>
   </p:sldIdLst>
   <p:sldSz cx="12192000" cy="6858000"/>
   <p:notesSz cx="6858000" cy="9144000"/>
@@ -108,6 +115,11 @@
       </a:defRPr>
     </a:lvl9pPr>
   </p:defaultTextStyle>
+  <p:extLst>
+    <p:ext uri="{EFAFB233-063F-42B5-8137-9DF3F51BA10A}">
+      <p15:sldGuideLst xmlns:p15="http://schemas.microsoft.com/office/powerpoint/2012/main"/>
+    </p:ext>
+  </p:extLst>
 </p:presentation>
 </file>
 
@@ -193,7 +205,7 @@
           <a:p>
             <a:fld id="{26D4B652-66BD-447C-8A3F-6594BE51C926}" type="datetimeFigureOut">
               <a:rPr lang="en-AU" smtClean="0"/>
-              <a:t>3/08/2023</a:t>
+              <a:t>5/08/2023</a:t>
             </a:fld>
             <a:endParaRPr lang="en-AU"/>
           </a:p>
@@ -732,7 +744,7 @@
           <a:p>
             <a:fld id="{CD0DF2B4-40EF-4023-8789-1964B9F8EE2E}" type="datetimeFigureOut">
               <a:rPr lang="en-AU" smtClean="0"/>
-              <a:t>3/08/2023</a:t>
+              <a:t>5/08/2023</a:t>
             </a:fld>
             <a:endParaRPr lang="en-AU"/>
           </a:p>
@@ -932,7 +944,7 @@
           <a:p>
             <a:fld id="{CD0DF2B4-40EF-4023-8789-1964B9F8EE2E}" type="datetimeFigureOut">
               <a:rPr lang="en-AU" smtClean="0"/>
-              <a:t>3/08/2023</a:t>
+              <a:t>5/08/2023</a:t>
             </a:fld>
             <a:endParaRPr lang="en-AU"/>
           </a:p>
@@ -1142,7 +1154,7 @@
           <a:p>
             <a:fld id="{CD0DF2B4-40EF-4023-8789-1964B9F8EE2E}" type="datetimeFigureOut">
               <a:rPr lang="en-AU" smtClean="0"/>
-              <a:t>3/08/2023</a:t>
+              <a:t>5/08/2023</a:t>
             </a:fld>
             <a:endParaRPr lang="en-AU"/>
           </a:p>
@@ -1342,7 +1354,7 @@
           <a:p>
             <a:fld id="{CD0DF2B4-40EF-4023-8789-1964B9F8EE2E}" type="datetimeFigureOut">
               <a:rPr lang="en-AU" smtClean="0"/>
-              <a:t>3/08/2023</a:t>
+              <a:t>5/08/2023</a:t>
             </a:fld>
             <a:endParaRPr lang="en-AU"/>
           </a:p>
@@ -1618,7 +1630,7 @@
           <a:p>
             <a:fld id="{CD0DF2B4-40EF-4023-8789-1964B9F8EE2E}" type="datetimeFigureOut">
               <a:rPr lang="en-AU" smtClean="0"/>
-              <a:t>3/08/2023</a:t>
+              <a:t>5/08/2023</a:t>
             </a:fld>
             <a:endParaRPr lang="en-AU"/>
           </a:p>
@@ -1886,7 +1898,7 @@
           <a:p>
             <a:fld id="{CD0DF2B4-40EF-4023-8789-1964B9F8EE2E}" type="datetimeFigureOut">
               <a:rPr lang="en-AU" smtClean="0"/>
-              <a:t>3/08/2023</a:t>
+              <a:t>5/08/2023</a:t>
             </a:fld>
             <a:endParaRPr lang="en-AU"/>
           </a:p>
@@ -2301,7 +2313,7 @@
           <a:p>
             <a:fld id="{CD0DF2B4-40EF-4023-8789-1964B9F8EE2E}" type="datetimeFigureOut">
               <a:rPr lang="en-AU" smtClean="0"/>
-              <a:t>3/08/2023</a:t>
+              <a:t>5/08/2023</a:t>
             </a:fld>
             <a:endParaRPr lang="en-AU"/>
           </a:p>
@@ -2443,7 +2455,7 @@
           <a:p>
             <a:fld id="{CD0DF2B4-40EF-4023-8789-1964B9F8EE2E}" type="datetimeFigureOut">
               <a:rPr lang="en-AU" smtClean="0"/>
-              <a:t>3/08/2023</a:t>
+              <a:t>5/08/2023</a:t>
             </a:fld>
             <a:endParaRPr lang="en-AU"/>
           </a:p>
@@ -2556,7 +2568,7 @@
           <a:p>
             <a:fld id="{CD0DF2B4-40EF-4023-8789-1964B9F8EE2E}" type="datetimeFigureOut">
               <a:rPr lang="en-AU" smtClean="0"/>
-              <a:t>3/08/2023</a:t>
+              <a:t>5/08/2023</a:t>
             </a:fld>
             <a:endParaRPr lang="en-AU"/>
           </a:p>
@@ -2869,7 +2881,7 @@
           <a:p>
             <a:fld id="{CD0DF2B4-40EF-4023-8789-1964B9F8EE2E}" type="datetimeFigureOut">
               <a:rPr lang="en-AU" smtClean="0"/>
-              <a:t>3/08/2023</a:t>
+              <a:t>5/08/2023</a:t>
             </a:fld>
             <a:endParaRPr lang="en-AU"/>
           </a:p>
@@ -3158,7 +3170,7 @@
           <a:p>
             <a:fld id="{CD0DF2B4-40EF-4023-8789-1964B9F8EE2E}" type="datetimeFigureOut">
               <a:rPr lang="en-AU" smtClean="0"/>
-              <a:t>3/08/2023</a:t>
+              <a:t>5/08/2023</a:t>
             </a:fld>
             <a:endParaRPr lang="en-AU"/>
           </a:p>
@@ -3401,7 +3413,7 @@
           <a:p>
             <a:fld id="{CD0DF2B4-40EF-4023-8789-1964B9F8EE2E}" type="datetimeFigureOut">
               <a:rPr lang="en-AU" smtClean="0"/>
-              <a:t>3/08/2023</a:t>
+              <a:t>5/08/2023</a:t>
             </a:fld>
             <a:endParaRPr lang="en-AU"/>
           </a:p>
@@ -4418,6 +4430,14 @@
 <file path=ppt/slides/slide2.xml><?xml version="1.0" encoding="utf-8"?>
 <p:sld xmlns:a="http://schemas.openxmlformats.org/drawingml/2006/main" xmlns:r="http://schemas.openxmlformats.org/officeDocument/2006/relationships" xmlns:p="http://schemas.openxmlformats.org/presentationml/2006/main">
   <p:cSld>
+    <p:bg>
+      <p:bgPr>
+        <a:solidFill>
+          <a:schemeClr val="bg1"/>
+        </a:solidFill>
+        <a:effectLst/>
+      </p:bgPr>
+    </p:bg>
     <p:spTree>
       <p:nvGrpSpPr>
         <p:cNvPr id="1" name=""/>
@@ -4434,6 +4454,134 @@
       </p:grpSpPr>
       <p:sp>
         <p:nvSpPr>
+          <p:cNvPr id="12" name="Rectangle 8">
+            <a:extLst>
+              <a:ext uri="{FF2B5EF4-FFF2-40B4-BE49-F238E27FC236}">
+                <a16:creationId xmlns:a16="http://schemas.microsoft.com/office/drawing/2014/main" id="{428D436F-9ACD-4C92-AFC8-C934C527A6A4}"/>
+              </a:ext>
+              <a:ext uri="{C183D7F6-B498-43B3-948B-1728B52AA6E4}">
+                <adec:decorative xmlns:adec="http://schemas.microsoft.com/office/drawing/2017/decorative" val="1"/>
+              </a:ext>
+            </a:extLst>
+          </p:cNvPr>
+          <p:cNvSpPr>
+            <a:spLocks noGrp="1" noRot="1" noChangeAspect="1" noMove="1" noResize="1" noEditPoints="1" noAdjustHandles="1" noChangeArrowheads="1" noChangeShapeType="1" noTextEdit="1"/>
+          </p:cNvSpPr>
+          <p:nvPr>
+            <p:extLst>
+              <p:ext uri="{386F3935-93C4-4BCD-93E2-E3B085C9AB24}">
+                <p16:designElem xmlns:p16="http://schemas.microsoft.com/office/powerpoint/2015/main" val="1"/>
+              </p:ext>
+            </p:extLst>
+          </p:nvPr>
+        </p:nvSpPr>
+        <p:spPr>
+          <a:xfrm>
+            <a:off x="6096000" y="0"/>
+            <a:ext cx="6096000" cy="6858000"/>
+          </a:xfrm>
+          <a:prstGeom prst="rect">
+            <a:avLst/>
+          </a:prstGeom>
+          <a:solidFill>
+            <a:schemeClr val="tx1">
+              <a:alpha val="8000"/>
+            </a:schemeClr>
+          </a:solidFill>
+          <a:ln>
+            <a:noFill/>
+          </a:ln>
+        </p:spPr>
+        <p:style>
+          <a:lnRef idx="2">
+            <a:schemeClr val="accent1">
+              <a:shade val="50000"/>
+            </a:schemeClr>
+          </a:lnRef>
+          <a:fillRef idx="1">
+            <a:schemeClr val="accent1"/>
+          </a:fillRef>
+          <a:effectRef idx="0">
+            <a:schemeClr val="accent1"/>
+          </a:effectRef>
+          <a:fontRef idx="minor">
+            <a:schemeClr val="lt1"/>
+          </a:fontRef>
+        </p:style>
+        <p:txBody>
+          <a:bodyPr rtlCol="0" anchor="ctr"/>
+          <a:lstStyle/>
+          <a:p>
+            <a:pPr algn="ctr"/>
+            <a:endParaRPr lang="en-US"/>
+          </a:p>
+        </p:txBody>
+      </p:sp>
+      <p:sp>
+        <p:nvSpPr>
+          <p:cNvPr id="11" name="Rectangle 10">
+            <a:extLst>
+              <a:ext uri="{FF2B5EF4-FFF2-40B4-BE49-F238E27FC236}">
+                <a16:creationId xmlns:a16="http://schemas.microsoft.com/office/drawing/2014/main" id="{090538E0-A884-4E60-A6AB-77D830E2FCED}"/>
+              </a:ext>
+              <a:ext uri="{C183D7F6-B498-43B3-948B-1728B52AA6E4}">
+                <adec:decorative xmlns:adec="http://schemas.microsoft.com/office/drawing/2017/decorative" val="1"/>
+              </a:ext>
+            </a:extLst>
+          </p:cNvPr>
+          <p:cNvSpPr>
+            <a:spLocks noGrp="1" noRot="1" noChangeAspect="1" noMove="1" noResize="1" noEditPoints="1" noAdjustHandles="1" noChangeArrowheads="1" noChangeShapeType="1" noTextEdit="1"/>
+          </p:cNvSpPr>
+          <p:nvPr>
+            <p:extLst>
+              <p:ext uri="{386F3935-93C4-4BCD-93E2-E3B085C9AB24}">
+                <p16:designElem xmlns:p16="http://schemas.microsoft.com/office/powerpoint/2015/main" val="1"/>
+              </p:ext>
+            </p:extLst>
+          </p:nvPr>
+        </p:nvSpPr>
+        <p:spPr>
+          <a:xfrm>
+            <a:off x="1453478" y="0"/>
+            <a:ext cx="4657389" cy="6858000"/>
+          </a:xfrm>
+          <a:prstGeom prst="rect">
+            <a:avLst/>
+          </a:prstGeom>
+          <a:solidFill>
+            <a:schemeClr val="accent2"/>
+          </a:solidFill>
+          <a:ln>
+            <a:noFill/>
+          </a:ln>
+        </p:spPr>
+        <p:style>
+          <a:lnRef idx="2">
+            <a:schemeClr val="accent1">
+              <a:shade val="50000"/>
+            </a:schemeClr>
+          </a:lnRef>
+          <a:fillRef idx="1">
+            <a:schemeClr val="accent1"/>
+          </a:fillRef>
+          <a:effectRef idx="0">
+            <a:schemeClr val="accent1"/>
+          </a:effectRef>
+          <a:fontRef idx="minor">
+            <a:schemeClr val="lt1"/>
+          </a:fontRef>
+        </p:style>
+        <p:txBody>
+          <a:bodyPr rtlCol="0" anchor="ctr"/>
+          <a:lstStyle/>
+          <a:p>
+            <a:pPr algn="ctr"/>
+            <a:endParaRPr lang="en-US"/>
+          </a:p>
+        </p:txBody>
+      </p:sp>
+      <p:sp>
+        <p:nvSpPr>
           <p:cNvPr id="2" name="Title 1">
             <a:extLst>
               <a:ext uri="{FF2B5EF4-FFF2-40B4-BE49-F238E27FC236}">
@@ -4448,155 +4596,200 @@
             <p:ph type="title"/>
           </p:nvPr>
         </p:nvSpPr>
-        <p:spPr/>
-        <p:txBody>
-          <a:bodyPr>
-            <a:normAutofit fontScale="90000"/>
+        <p:spPr>
+          <a:xfrm>
+            <a:off x="1901162" y="3050434"/>
+            <a:ext cx="3722933" cy="757130"/>
+          </a:xfrm>
+          <a:ln w="25400" cap="sq">
+            <a:solidFill>
+              <a:srgbClr val="FFFFFF"/>
+            </a:solidFill>
+            <a:miter lim="800000"/>
+          </a:ln>
+        </p:spPr>
+        <p:txBody>
+          <a:bodyPr vert="horz" wrap="square" lIns="91440" tIns="45720" rIns="91440" bIns="45720" rtlCol="0" anchor="ctr">
+            <a:normAutofit/>
           </a:bodyPr>
           <a:lstStyle/>
           <a:p>
-            <a:r>
-              <a:rPr lang="en-US" sz="3100" b="0" i="0" u="none" strike="noStrike" baseline="0" dirty="0">
+            <a:pPr algn="ctr"/>
+            <a:r>
+              <a:rPr lang="en-US" sz="1500" b="0" i="0" u="none" strike="noStrike" kern="1200" baseline="0">
                 <a:solidFill>
-                  <a:srgbClr val="2D74B5"/>
+                  <a:srgbClr val="FFFFFF"/>
                 </a:solidFill>
-                <a:latin typeface="Calibri" panose="020F0502020204030204" pitchFamily="34" charset="0"/>
+                <a:latin typeface="+mj-lt"/>
+                <a:ea typeface="+mj-ea"/>
+                <a:cs typeface="+mj-cs"/>
               </a:rPr>
               <a:t>Topic 2 Implement safeguard CIS 2.5 Allowlist Authorized Software </a:t>
             </a:r>
             <a:br>
-              <a:rPr lang="en-US" sz="4400" b="0" i="0" u="none" strike="noStrike" baseline="0" dirty="0">
+              <a:rPr lang="en-US" sz="1500" b="0" i="0" u="none" strike="noStrike" kern="1200" baseline="0">
                 <a:solidFill>
-                  <a:srgbClr val="2D74B5"/>
+                  <a:srgbClr val="FFFFFF"/>
                 </a:solidFill>
-                <a:latin typeface="Calibri" panose="020F0502020204030204" pitchFamily="34" charset="0"/>
+                <a:latin typeface="+mj-lt"/>
+                <a:ea typeface="+mj-ea"/>
+                <a:cs typeface="+mj-cs"/>
               </a:rPr>
             </a:br>
-            <a:endParaRPr lang="en-AU" dirty="0"/>
-          </a:p>
-        </p:txBody>
-      </p:sp>
-      <p:sp>
-        <p:nvSpPr>
-          <p:cNvPr id="3" name="Content Placeholder 2">
-            <a:extLst>
-              <a:ext uri="{FF2B5EF4-FFF2-40B4-BE49-F238E27FC236}">
-                <a16:creationId xmlns:a16="http://schemas.microsoft.com/office/drawing/2014/main" id="{17429563-F99E-22DF-6F44-B059B604463E}"/>
-              </a:ext>
-            </a:extLst>
-          </p:cNvPr>
-          <p:cNvSpPr>
-            <a:spLocks noGrp="1"/>
-          </p:cNvSpPr>
-          <p:nvPr>
-            <p:ph idx="1"/>
+            <a:endParaRPr lang="en-US" sz="1500" kern="1200">
+              <a:solidFill>
+                <a:srgbClr val="FFFFFF"/>
+              </a:solidFill>
+              <a:latin typeface="+mj-lt"/>
+              <a:ea typeface="+mj-ea"/>
+              <a:cs typeface="+mj-cs"/>
+            </a:endParaRPr>
+          </a:p>
+        </p:txBody>
+      </p:sp>
+      <p:sp>
+        <p:nvSpPr>
+          <p:cNvPr id="13" name="Rectangle 12">
+            <a:extLst>
+              <a:ext uri="{FF2B5EF4-FFF2-40B4-BE49-F238E27FC236}">
+                <a16:creationId xmlns:a16="http://schemas.microsoft.com/office/drawing/2014/main" id="{DB0D7DD0-1C67-4D4C-9E06-678233DB8468}"/>
+              </a:ext>
+              <a:ext uri="{C183D7F6-B498-43B3-948B-1728B52AA6E4}">
+                <adec:decorative xmlns:adec="http://schemas.microsoft.com/office/drawing/2017/decorative" val="1"/>
+              </a:ext>
+            </a:extLst>
+          </p:cNvPr>
+          <p:cNvSpPr>
+            <a:spLocks noGrp="1" noRot="1" noChangeAspect="1" noMove="1" noResize="1" noEditPoints="1" noAdjustHandles="1" noChangeArrowheads="1" noChangeShapeType="1" noTextEdit="1"/>
+          </p:cNvSpPr>
+          <p:nvPr>
+            <p:extLst>
+              <p:ext uri="{386F3935-93C4-4BCD-93E2-E3B085C9AB24}">
+                <p16:designElem xmlns:p16="http://schemas.microsoft.com/office/powerpoint/2015/main" val="1"/>
+              </p:ext>
+            </p:extLst>
           </p:nvPr>
         </p:nvSpPr>
         <p:spPr>
           <a:xfrm>
-            <a:off x="369116" y="1825625"/>
-            <a:ext cx="4911755" cy="4351338"/>
+            <a:off x="0" y="0"/>
+            <a:ext cx="1453478" cy="6858000"/>
+          </a:xfrm>
+          <a:prstGeom prst="rect">
+            <a:avLst/>
+          </a:prstGeom>
+          <a:solidFill>
+            <a:srgbClr val="404040">
+              <a:alpha val="80000"/>
+            </a:srgbClr>
+          </a:solidFill>
+          <a:ln>
+            <a:noFill/>
+          </a:ln>
+        </p:spPr>
+        <p:style>
+          <a:lnRef idx="2">
+            <a:schemeClr val="accent1">
+              <a:shade val="50000"/>
+            </a:schemeClr>
+          </a:lnRef>
+          <a:fillRef idx="1">
+            <a:schemeClr val="accent1"/>
+          </a:fillRef>
+          <a:effectRef idx="0">
+            <a:schemeClr val="accent1"/>
+          </a:effectRef>
+          <a:fontRef idx="minor">
+            <a:schemeClr val="lt1"/>
+          </a:fontRef>
+        </p:style>
+        <p:txBody>
+          <a:bodyPr rtlCol="0" anchor="ctr"/>
+          <a:lstStyle/>
+          <a:p>
+            <a:pPr algn="ctr"/>
+            <a:endParaRPr lang="en-US"/>
+          </a:p>
+        </p:txBody>
+      </p:sp>
+      <p:sp>
+        <p:nvSpPr>
+          <p:cNvPr id="3" name="Content Placeholder 2">
+            <a:extLst>
+              <a:ext uri="{FF2B5EF4-FFF2-40B4-BE49-F238E27FC236}">
+                <a16:creationId xmlns:a16="http://schemas.microsoft.com/office/drawing/2014/main" id="{17429563-F99E-22DF-6F44-B059B604463E}"/>
+              </a:ext>
+            </a:extLst>
+          </p:cNvPr>
+          <p:cNvSpPr>
+            <a:spLocks noGrp="1"/>
+          </p:cNvSpPr>
+          <p:nvPr>
+            <p:ph idx="1"/>
+          </p:nvPr>
+        </p:nvSpPr>
+        <p:spPr>
+          <a:xfrm>
+            <a:off x="6574536" y="640080"/>
+            <a:ext cx="5053066" cy="2546604"/>
           </a:xfrm>
         </p:spPr>
         <p:txBody>
-          <a:bodyPr/>
+          <a:bodyPr vert="horz" lIns="91440" tIns="45720" rIns="91440" bIns="45720" rtlCol="0">
+            <a:normAutofit/>
+          </a:bodyPr>
           <a:lstStyle/>
           <a:p>
             <a:pPr marL="0" indent="0">
               <a:buNone/>
             </a:pPr>
             <a:r>
-              <a:rPr lang="en-US" sz="1800" b="0" i="0" u="none" strike="noStrike" baseline="0" dirty="0">
-                <a:solidFill>
-                  <a:srgbClr val="000000"/>
-                </a:solidFill>
-                <a:latin typeface="Calibri" panose="020F0502020204030204" pitchFamily="34" charset="0"/>
-              </a:rPr>
+              <a:rPr lang="en-US" sz="1600" b="1" i="0" u="none" strike="noStrike" baseline="0" dirty="0"/>
               <a:t>Background</a:t>
             </a:r>
           </a:p>
           <a:p>
             <a:r>
-              <a:rPr lang="en-US" sz="1800" b="0" i="0" u="none" strike="noStrike" baseline="0" dirty="0">
-                <a:solidFill>
-                  <a:srgbClr val="000000"/>
-                </a:solidFill>
-                <a:latin typeface="Calibri" panose="020F0502020204030204" pitchFamily="34" charset="0"/>
-              </a:rPr>
+              <a:rPr lang="en-US" sz="1300" b="0" i="0" u="none" strike="noStrike" baseline="0" dirty="0"/>
               <a:t>You work at the Monto Caravan and Cabin Park. </a:t>
             </a:r>
           </a:p>
           <a:p>
             <a:r>
-              <a:rPr lang="en-US" sz="1800" b="0" i="0" u="none" strike="noStrike" baseline="0" dirty="0">
-                <a:solidFill>
-                  <a:srgbClr val="000000"/>
-                </a:solidFill>
-                <a:latin typeface="Calibri" panose="020F0502020204030204" pitchFamily="34" charset="0"/>
-              </a:rPr>
+              <a:rPr lang="en-US" sz="1300" b="0" i="0" u="none" strike="noStrike" baseline="0" dirty="0"/>
               <a:t>Your boss has asked you to improve the cybersecurity of her workstation. </a:t>
             </a:r>
           </a:p>
           <a:p>
             <a:r>
-              <a:rPr lang="en-US" sz="1800" dirty="0">
-                <a:solidFill>
-                  <a:srgbClr val="000000"/>
-                </a:solidFill>
-                <a:latin typeface="Calibri" panose="020F0502020204030204" pitchFamily="34" charset="0"/>
-              </a:rPr>
+              <a:rPr lang="en-US" sz="1300" dirty="0"/>
               <a:t>D</a:t>
             </a:r>
             <a:r>
-              <a:rPr lang="en-US" sz="1800" b="0" i="0" u="none" strike="noStrike" baseline="0" dirty="0">
-                <a:solidFill>
-                  <a:srgbClr val="000000"/>
-                </a:solidFill>
-                <a:latin typeface="Calibri" panose="020F0502020204030204" pitchFamily="34" charset="0"/>
-              </a:rPr>
+              <a:rPr lang="en-US" sz="1300" b="0" i="0" u="none" strike="noStrike" baseline="0" dirty="0"/>
               <a:t>evelop a portfolio of evidence of the implementation and testing of a safeguard. </a:t>
             </a:r>
           </a:p>
           <a:p>
             <a:r>
-              <a:rPr lang="en-US" sz="1800" b="0" i="0" u="none" strike="noStrike" baseline="0" dirty="0">
-                <a:solidFill>
-                  <a:srgbClr val="000000"/>
-                </a:solidFill>
-                <a:latin typeface="Calibri" panose="020F0502020204030204" pitchFamily="34" charset="0"/>
-              </a:rPr>
+              <a:rPr lang="en-US" sz="1300" b="0" i="0" u="none" strike="noStrike" baseline="0" dirty="0"/>
               <a:t>Your boss uses the Win11 virtual machine</a:t>
             </a:r>
           </a:p>
           <a:p>
             <a:r>
-              <a:rPr lang="en-US" sz="1800" b="0" i="0" u="none" strike="noStrike" baseline="0" dirty="0">
-                <a:solidFill>
-                  <a:srgbClr val="000000"/>
-                </a:solidFill>
-                <a:latin typeface="Calibri" panose="020F0502020204030204" pitchFamily="34" charset="0"/>
-              </a:rPr>
+              <a:rPr lang="en-US" sz="1300" b="0" i="0" u="none" strike="noStrike" baseline="0" dirty="0"/>
               <a:t>To implement an allowlist of </a:t>
             </a:r>
             <a:r>
-              <a:rPr lang="en-US" sz="1800" b="0" i="0" u="none" strike="noStrike" baseline="0" dirty="0" err="1">
-                <a:solidFill>
-                  <a:srgbClr val="000000"/>
-                </a:solidFill>
-                <a:latin typeface="Calibri" panose="020F0502020204030204" pitchFamily="34" charset="0"/>
-              </a:rPr>
+              <a:rPr lang="en-US" sz="1300" b="0" i="0" u="none" strike="noStrike" baseline="0" dirty="0" err="1"/>
               <a:t>authorised</a:t>
             </a:r>
             <a:r>
-              <a:rPr lang="en-US" sz="1800" b="0" i="0" u="none" strike="noStrike" baseline="0" dirty="0">
-                <a:solidFill>
-                  <a:srgbClr val="000000"/>
-                </a:solidFill>
-                <a:latin typeface="Calibri" panose="020F0502020204030204" pitchFamily="34" charset="0"/>
-              </a:rPr>
+              <a:rPr lang="en-US" sz="1300" b="0" i="0" u="none" strike="noStrike" baseline="0" dirty="0"/>
               <a:t> software you will configure Windows Defender Application Control (WDAC) in Win11. </a:t>
             </a:r>
-            <a:endParaRPr lang="en-AU" dirty="0"/>
+            <a:endParaRPr lang="en-US" sz="1300" dirty="0"/>
           </a:p>
         </p:txBody>
       </p:sp>
@@ -4616,8 +4809,8 @@
         </p:nvSpPr>
         <p:spPr>
           <a:xfrm>
-            <a:off x="5525549" y="1825625"/>
-            <a:ext cx="4911755" cy="4351338"/>
+            <a:off x="6570204" y="3671315"/>
+            <a:ext cx="5057398" cy="2546605"/>
           </a:xfrm>
           <a:prstGeom prst="rect">
             <a:avLst/>
@@ -4625,7 +4818,7 @@
         </p:spPr>
         <p:txBody>
           <a:bodyPr vert="horz" lIns="91440" tIns="45720" rIns="91440" bIns="45720" rtlCol="0">
-            <a:normAutofit/>
+            <a:normAutofit lnSpcReduction="10000"/>
           </a:bodyPr>
           <a:lstStyle>
             <a:lvl1pPr marL="228600" indent="-228600" algn="l" defTabSz="914400" rtl="0" eaLnBrk="1" latinLnBrk="0" hangingPunct="1">
@@ -4793,173 +4986,81 @@
           </a:lstStyle>
           <a:p>
             <a:pPr marL="0" indent="0">
-              <a:buFont typeface="Arial" panose="020B0604020202020204" pitchFamily="34" charset="0"/>
               <a:buNone/>
             </a:pPr>
             <a:r>
-              <a:rPr lang="en-US" sz="1800" dirty="0">
-                <a:solidFill>
-                  <a:srgbClr val="000000"/>
-                </a:solidFill>
-                <a:latin typeface="Calibri" panose="020F0502020204030204" pitchFamily="34" charset="0"/>
-              </a:rPr>
+              <a:rPr lang="en-US" sz="1600" b="1" dirty="0"/>
               <a:t>Task</a:t>
             </a:r>
           </a:p>
           <a:p>
             <a:r>
-              <a:rPr lang="en-US" sz="1800" dirty="0">
-                <a:solidFill>
-                  <a:srgbClr val="000000"/>
-                </a:solidFill>
-                <a:latin typeface="Calibri" panose="020F0502020204030204" pitchFamily="34" charset="0"/>
-              </a:rPr>
+              <a:rPr lang="en-US" sz="1300" dirty="0"/>
               <a:t>Create 1 script called defend.ps1 with 4 functions:</a:t>
             </a:r>
           </a:p>
           <a:p>
-            <a:pPr marL="800100" lvl="1" indent="-342900">
-              <a:buFont typeface="+mj-lt"/>
-              <a:buAutoNum type="arabicPeriod"/>
-            </a:pPr>
-            <a:r>
-              <a:rPr lang="en-US" sz="1400" dirty="0" err="1">
-                <a:solidFill>
-                  <a:srgbClr val="000000"/>
-                </a:solidFill>
-                <a:latin typeface="Calibri" panose="020F0502020204030204" pitchFamily="34" charset="0"/>
-              </a:rPr>
+            <a:pPr marL="800100" lvl="1"/>
+            <a:r>
+              <a:rPr lang="en-US" sz="1300" dirty="0" err="1"/>
               <a:t>testWDAC</a:t>
             </a:r>
             <a:r>
-              <a:rPr lang="en-US" sz="1400" dirty="0">
-                <a:solidFill>
-                  <a:srgbClr val="000000"/>
-                </a:solidFill>
-                <a:latin typeface="Calibri" panose="020F0502020204030204" pitchFamily="34" charset="0"/>
-              </a:rPr>
+              <a:rPr lang="en-US" sz="1300" dirty="0"/>
               <a:t>() – opens an untrusted app, and logs success or failure.</a:t>
             </a:r>
           </a:p>
           <a:p>
-            <a:pPr marL="800100" lvl="1" indent="-342900">
-              <a:buFont typeface="+mj-lt"/>
-              <a:buAutoNum type="arabicPeriod"/>
-            </a:pPr>
-            <a:r>
-              <a:rPr lang="en-US" sz="1400" dirty="0" err="1">
-                <a:solidFill>
-                  <a:srgbClr val="000000"/>
-                </a:solidFill>
-                <a:latin typeface="Calibri" panose="020F0502020204030204" pitchFamily="34" charset="0"/>
-              </a:rPr>
+            <a:pPr marL="800100" lvl="1"/>
+            <a:r>
+              <a:rPr lang="en-US" sz="1300" dirty="0" err="1"/>
               <a:t>setupWDAC</a:t>
             </a:r>
             <a:r>
-              <a:rPr lang="en-US" sz="1400" dirty="0">
-                <a:solidFill>
-                  <a:srgbClr val="000000"/>
-                </a:solidFill>
-                <a:latin typeface="Calibri" panose="020F0502020204030204" pitchFamily="34" charset="0"/>
-              </a:rPr>
+              <a:rPr lang="en-US" sz="1300" dirty="0"/>
               <a:t>() – compiles a block policy.</a:t>
             </a:r>
           </a:p>
           <a:p>
-            <a:pPr marL="800100" lvl="1" indent="-342900">
-              <a:buFont typeface="+mj-lt"/>
-              <a:buAutoNum type="arabicPeriod"/>
-            </a:pPr>
-            <a:r>
-              <a:rPr lang="en-US" sz="1400" dirty="0" err="1">
-                <a:solidFill>
-                  <a:srgbClr val="000000"/>
-                </a:solidFill>
-                <a:latin typeface="Calibri" panose="020F0502020204030204" pitchFamily="34" charset="0"/>
-              </a:rPr>
+            <a:pPr marL="800100" lvl="1"/>
+            <a:r>
+              <a:rPr lang="en-US" sz="1300" dirty="0" err="1"/>
               <a:t>enableWDAC</a:t>
             </a:r>
             <a:r>
-              <a:rPr lang="en-US" sz="1400" dirty="0">
-                <a:solidFill>
-                  <a:srgbClr val="000000"/>
-                </a:solidFill>
-                <a:latin typeface="Calibri" panose="020F0502020204030204" pitchFamily="34" charset="0"/>
-              </a:rPr>
+              <a:rPr lang="en-US" sz="1300" dirty="0"/>
               <a:t>() –applies block policy.</a:t>
             </a:r>
           </a:p>
           <a:p>
-            <a:pPr marL="800100" lvl="1" indent="-342900">
-              <a:buFont typeface="+mj-lt"/>
-              <a:buAutoNum type="arabicPeriod"/>
-            </a:pPr>
-            <a:r>
-              <a:rPr lang="en-US" sz="1400" dirty="0" err="1">
-                <a:solidFill>
-                  <a:srgbClr val="000000"/>
-                </a:solidFill>
-                <a:latin typeface="Calibri" panose="020F0502020204030204" pitchFamily="34" charset="0"/>
-              </a:rPr>
+            <a:pPr marL="800100" lvl="1"/>
+            <a:r>
+              <a:rPr lang="en-US" sz="1300" dirty="0" err="1"/>
               <a:t>resetWDAC</a:t>
             </a:r>
             <a:r>
-              <a:rPr lang="en-US" sz="1400" dirty="0">
-                <a:solidFill>
-                  <a:srgbClr val="000000"/>
-                </a:solidFill>
-                <a:latin typeface="Calibri" panose="020F0502020204030204" pitchFamily="34" charset="0"/>
-              </a:rPr>
+              <a:rPr lang="en-US" sz="1300" dirty="0"/>
               <a:t>() – removed the block policy.</a:t>
             </a:r>
           </a:p>
           <a:p>
             <a:r>
-              <a:rPr lang="en-US" sz="1800" dirty="0" err="1">
-                <a:solidFill>
-                  <a:srgbClr val="000000"/>
-                </a:solidFill>
-                <a:latin typeface="Calibri" panose="020F0502020204030204" pitchFamily="34" charset="0"/>
-              </a:rPr>
+              <a:rPr lang="en-US" sz="1300" dirty="0" err="1"/>
               <a:t>Utilise</a:t>
             </a:r>
             <a:r>
-              <a:rPr lang="en-US" sz="1800" dirty="0">
-                <a:solidFill>
-                  <a:srgbClr val="000000"/>
-                </a:solidFill>
-                <a:latin typeface="Calibri" panose="020F0502020204030204" pitchFamily="34" charset="0"/>
-              </a:rPr>
+              <a:rPr lang="en-US" sz="1300" dirty="0"/>
               <a:t> GitHub for version control, project management &amp; peer programing.</a:t>
             </a:r>
           </a:p>
           <a:p>
             <a:r>
-              <a:rPr lang="en-US" sz="1800" dirty="0">
-                <a:solidFill>
-                  <a:srgbClr val="000000"/>
-                </a:solidFill>
-                <a:latin typeface="Calibri" panose="020F0502020204030204" pitchFamily="34" charset="0"/>
-              </a:rPr>
-              <a:t>Test the solution and present to stake </a:t>
-            </a:r>
-            <a:r>
-              <a:rPr lang="en-US" sz="1800">
-                <a:solidFill>
-                  <a:srgbClr val="000000"/>
-                </a:solidFill>
-                <a:latin typeface="Calibri" panose="020F0502020204030204" pitchFamily="34" charset="0"/>
-              </a:rPr>
-              <a:t>holders.</a:t>
-            </a:r>
-          </a:p>
-          <a:p>
-            <a:endParaRPr lang="en-US" sz="1800" dirty="0">
-              <a:solidFill>
-                <a:srgbClr val="000000"/>
-              </a:solidFill>
-              <a:latin typeface="Calibri" panose="020F0502020204030204" pitchFamily="34" charset="0"/>
-            </a:endParaRPr>
+              <a:rPr lang="en-US" sz="1300" dirty="0"/>
+              <a:t>Test the solution and present to stake holders.</a:t>
+            </a:r>
+          </a:p>
+          <a:p>
+            <a:endParaRPr lang="en-US" sz="1300" dirty="0"/>
           </a:p>
         </p:txBody>
       </p:sp>
@@ -4967,6 +5068,1072 @@
     <p:extLst>
       <p:ext uri="{BB962C8B-B14F-4D97-AF65-F5344CB8AC3E}">
         <p14:creationId xmlns:p14="http://schemas.microsoft.com/office/powerpoint/2010/main" val="1703360667"/>
+      </p:ext>
+    </p:extLst>
+  </p:cSld>
+  <p:clrMapOvr>
+    <a:masterClrMapping/>
+  </p:clrMapOvr>
+</p:sld>
+</file>
+
+<file path=ppt/slides/slide3.xml><?xml version="1.0" encoding="utf-8"?>
+<p:sld xmlns:a="http://schemas.openxmlformats.org/drawingml/2006/main" xmlns:r="http://schemas.openxmlformats.org/officeDocument/2006/relationships" xmlns:p="http://schemas.openxmlformats.org/presentationml/2006/main">
+  <p:cSld>
+    <p:bg>
+      <p:bgPr>
+        <a:solidFill>
+          <a:schemeClr val="bg1"/>
+        </a:solidFill>
+        <a:effectLst/>
+      </p:bgPr>
+    </p:bg>
+    <p:spTree>
+      <p:nvGrpSpPr>
+        <p:cNvPr id="1" name=""/>
+        <p:cNvGrpSpPr/>
+        <p:nvPr/>
+      </p:nvGrpSpPr>
+      <p:grpSpPr>
+        <a:xfrm>
+          <a:off x="0" y="0"/>
+          <a:ext cx="0" cy="0"/>
+          <a:chOff x="0" y="0"/>
+          <a:chExt cx="0" cy="0"/>
+        </a:xfrm>
+      </p:grpSpPr>
+      <p:sp useBgFill="1">
+        <p:nvSpPr>
+          <p:cNvPr id="13" name="Rectangle 12">
+            <a:extLst>
+              <a:ext uri="{FF2B5EF4-FFF2-40B4-BE49-F238E27FC236}">
+                <a16:creationId xmlns:a16="http://schemas.microsoft.com/office/drawing/2014/main" id="{D2B783EE-0239-4717-BBEA-8C9EAC61C824}"/>
+              </a:ext>
+              <a:ext uri="{C183D7F6-B498-43B3-948B-1728B52AA6E4}">
+                <adec:decorative xmlns:adec="http://schemas.microsoft.com/office/drawing/2017/decorative" val="1"/>
+              </a:ext>
+            </a:extLst>
+          </p:cNvPr>
+          <p:cNvSpPr>
+            <a:spLocks noGrp="1" noRot="1" noChangeAspect="1" noMove="1" noResize="1" noEditPoints="1" noAdjustHandles="1" noChangeArrowheads="1" noChangeShapeType="1" noTextEdit="1"/>
+          </p:cNvSpPr>
+          <p:nvPr>
+            <p:extLst>
+              <p:ext uri="{386F3935-93C4-4BCD-93E2-E3B085C9AB24}">
+                <p16:designElem xmlns:p16="http://schemas.microsoft.com/office/powerpoint/2015/main" val="1"/>
+              </p:ext>
+            </p:extLst>
+          </p:nvPr>
+        </p:nvSpPr>
+        <p:spPr>
+          <a:xfrm>
+            <a:off x="0" y="0"/>
+            <a:ext cx="12192000" cy="6858000"/>
+          </a:xfrm>
+          <a:prstGeom prst="rect">
+            <a:avLst/>
+          </a:prstGeom>
+          <a:ln>
+            <a:noFill/>
+          </a:ln>
+        </p:spPr>
+        <p:style>
+          <a:lnRef idx="2">
+            <a:schemeClr val="accent1">
+              <a:shade val="50000"/>
+            </a:schemeClr>
+          </a:lnRef>
+          <a:fillRef idx="1">
+            <a:schemeClr val="accent1"/>
+          </a:fillRef>
+          <a:effectRef idx="0">
+            <a:schemeClr val="accent1"/>
+          </a:effectRef>
+          <a:fontRef idx="minor">
+            <a:schemeClr val="lt1"/>
+          </a:fontRef>
+        </p:style>
+        <p:txBody>
+          <a:bodyPr rtlCol="0" anchor="ctr"/>
+          <a:lstStyle/>
+          <a:p>
+            <a:pPr algn="ctr"/>
+            <a:endParaRPr lang="en-US"/>
+          </a:p>
+        </p:txBody>
+      </p:sp>
+      <p:sp>
+        <p:nvSpPr>
+          <p:cNvPr id="2" name="Title 1">
+            <a:extLst>
+              <a:ext uri="{FF2B5EF4-FFF2-40B4-BE49-F238E27FC236}">
+                <a16:creationId xmlns:a16="http://schemas.microsoft.com/office/drawing/2014/main" id="{767AB293-D75B-1497-7511-F7386AD77237}"/>
+              </a:ext>
+            </a:extLst>
+          </p:cNvPr>
+          <p:cNvSpPr>
+            <a:spLocks noGrp="1"/>
+          </p:cNvSpPr>
+          <p:nvPr>
+            <p:ph type="title"/>
+          </p:nvPr>
+        </p:nvSpPr>
+        <p:spPr>
+          <a:xfrm>
+            <a:off x="838201" y="345810"/>
+            <a:ext cx="5120561" cy="1325563"/>
+          </a:xfrm>
+        </p:spPr>
+        <p:txBody>
+          <a:bodyPr>
+            <a:normAutofit/>
+          </a:bodyPr>
+          <a:lstStyle/>
+          <a:p>
+            <a:r>
+              <a:rPr lang="en-US"/>
+              <a:t>Communication &amp; Team Management </a:t>
+            </a:r>
+            <a:endParaRPr lang="en-AU" dirty="0"/>
+          </a:p>
+        </p:txBody>
+      </p:sp>
+      <p:sp>
+        <p:nvSpPr>
+          <p:cNvPr id="3" name="Content Placeholder 2">
+            <a:extLst>
+              <a:ext uri="{FF2B5EF4-FFF2-40B4-BE49-F238E27FC236}">
+                <a16:creationId xmlns:a16="http://schemas.microsoft.com/office/drawing/2014/main" id="{179FFD46-C2E6-11AF-E771-BA251C104196}"/>
+              </a:ext>
+            </a:extLst>
+          </p:cNvPr>
+          <p:cNvSpPr>
+            <a:spLocks noGrp="1"/>
+          </p:cNvSpPr>
+          <p:nvPr>
+            <p:ph idx="1"/>
+          </p:nvPr>
+        </p:nvSpPr>
+        <p:spPr>
+          <a:xfrm>
+            <a:off x="838201" y="1825625"/>
+            <a:ext cx="5092194" cy="4351338"/>
+          </a:xfrm>
+        </p:spPr>
+        <p:txBody>
+          <a:bodyPr>
+            <a:normAutofit/>
+          </a:bodyPr>
+          <a:lstStyle/>
+          <a:p>
+            <a:pPr marL="0" indent="0">
+              <a:buNone/>
+            </a:pPr>
+            <a:r>
+              <a:rPr lang="en-US" sz="1500" dirty="0"/>
+              <a:t>Git-Hub </a:t>
+            </a:r>
+          </a:p>
+          <a:p>
+            <a:r>
+              <a:rPr lang="en-US" sz="1500" dirty="0"/>
+              <a:t>Used to work on the same project at different times.</a:t>
+            </a:r>
+          </a:p>
+          <a:p>
+            <a:r>
+              <a:rPr lang="en-US" sz="1500" dirty="0"/>
+              <a:t>Comments and notes in the commits help to understand and review change.</a:t>
+            </a:r>
+          </a:p>
+          <a:p>
+            <a:r>
+              <a:rPr lang="en-US" sz="1500" dirty="0"/>
+              <a:t>Able to keep everyone working on the same project.</a:t>
+            </a:r>
+          </a:p>
+          <a:p>
+            <a:pPr marL="0" indent="0">
+              <a:buNone/>
+            </a:pPr>
+            <a:r>
+              <a:rPr lang="en-US" sz="1500" dirty="0"/>
+              <a:t>Projects</a:t>
+            </a:r>
+          </a:p>
+          <a:p>
+            <a:r>
+              <a:rPr lang="en-US" sz="1500" dirty="0"/>
+              <a:t>We used projects within Git Hub to manage what need to be done and who is responsible.</a:t>
+            </a:r>
+          </a:p>
+          <a:p>
+            <a:pPr marL="0" indent="0">
+              <a:buNone/>
+            </a:pPr>
+            <a:r>
+              <a:rPr lang="en-US" sz="1500" dirty="0"/>
+              <a:t>Teams</a:t>
+            </a:r>
+          </a:p>
+          <a:p>
+            <a:r>
+              <a:rPr lang="en-US" sz="1500" dirty="0"/>
+              <a:t>We used teams for our talk about channel, as well as our meeting platform.</a:t>
+            </a:r>
+          </a:p>
+          <a:p>
+            <a:pPr marL="0" indent="0">
+              <a:buNone/>
+            </a:pPr>
+            <a:r>
+              <a:rPr lang="en-US" sz="1500" dirty="0"/>
+              <a:t>Team Viewer</a:t>
+            </a:r>
+          </a:p>
+          <a:p>
+            <a:r>
+              <a:rPr lang="en-US" sz="1500" dirty="0"/>
+              <a:t>We used team viewer to share access to a VM for integration testing.</a:t>
+            </a:r>
+            <a:endParaRPr lang="en-AU" sz="1500" dirty="0"/>
+          </a:p>
+        </p:txBody>
+      </p:sp>
+      <p:sp>
+        <p:nvSpPr>
+          <p:cNvPr id="15" name="Oval 14">
+            <a:extLst>
+              <a:ext uri="{FF2B5EF4-FFF2-40B4-BE49-F238E27FC236}">
+                <a16:creationId xmlns:a16="http://schemas.microsoft.com/office/drawing/2014/main" id="{A7B99495-F43F-4D80-A44F-2CB4764EB90B}"/>
+              </a:ext>
+              <a:ext uri="{C183D7F6-B498-43B3-948B-1728B52AA6E4}">
+                <adec:decorative xmlns:adec="http://schemas.microsoft.com/office/drawing/2017/decorative" val="1"/>
+              </a:ext>
+            </a:extLst>
+          </p:cNvPr>
+          <p:cNvSpPr>
+            <a:spLocks noGrp="1" noRot="1" noChangeAspect="1" noMove="1" noResize="1" noEditPoints="1" noAdjustHandles="1" noChangeArrowheads="1" noChangeShapeType="1" noTextEdit="1"/>
+          </p:cNvSpPr>
+          <p:nvPr>
+            <p:extLst>
+              <p:ext uri="{386F3935-93C4-4BCD-93E2-E3B085C9AB24}">
+                <p16:designElem xmlns:p16="http://schemas.microsoft.com/office/powerpoint/2015/main" val="1"/>
+              </p:ext>
+            </p:extLst>
+          </p:nvPr>
+        </p:nvSpPr>
+        <p:spPr>
+          <a:xfrm>
+            <a:off x="10420569" y="1364732"/>
+            <a:ext cx="947488" cy="921785"/>
+          </a:xfrm>
+          <a:prstGeom prst="ellipse">
+            <a:avLst/>
+          </a:prstGeom>
+          <a:solidFill>
+            <a:schemeClr val="accent2"/>
+          </a:solidFill>
+          <a:ln>
+            <a:noFill/>
+          </a:ln>
+        </p:spPr>
+        <p:style>
+          <a:lnRef idx="2">
+            <a:schemeClr val="accent1">
+              <a:shade val="50000"/>
+            </a:schemeClr>
+          </a:lnRef>
+          <a:fillRef idx="1">
+            <a:schemeClr val="accent1"/>
+          </a:fillRef>
+          <a:effectRef idx="0">
+            <a:schemeClr val="accent1"/>
+          </a:effectRef>
+          <a:fontRef idx="minor">
+            <a:schemeClr val="lt1"/>
+          </a:fontRef>
+        </p:style>
+        <p:txBody>
+          <a:bodyPr rtlCol="0" anchor="ctr"/>
+          <a:lstStyle/>
+          <a:p>
+            <a:pPr marL="0" marR="0" lvl="0" indent="0" algn="ctr" defTabSz="914400" rtl="0" eaLnBrk="1" fontAlgn="auto" latinLnBrk="0" hangingPunct="1">
+              <a:lnSpc>
+                <a:spcPct val="100000"/>
+              </a:lnSpc>
+              <a:spcBef>
+                <a:spcPts val="0"/>
+              </a:spcBef>
+              <a:spcAft>
+                <a:spcPts val="0"/>
+              </a:spcAft>
+              <a:buClrTx/>
+              <a:buSzTx/>
+              <a:buFontTx/>
+              <a:buNone/>
+              <a:tabLst/>
+              <a:defRPr/>
+            </a:pPr>
+            <a:endParaRPr kumimoji="0" lang="en-US" sz="1800" b="0" i="0" u="none" strike="noStrike" kern="1200" cap="none" spc="0" normalizeH="0" baseline="0" noProof="0">
+              <a:ln>
+                <a:noFill/>
+              </a:ln>
+              <a:solidFill>
+                <a:srgbClr val="FFFFFF"/>
+              </a:solidFill>
+              <a:effectLst/>
+              <a:uLnTx/>
+              <a:uFillTx/>
+              <a:latin typeface="Calibri" panose="020F0502020204030204"/>
+              <a:ea typeface="+mn-ea"/>
+              <a:cs typeface="+mn-cs"/>
+            </a:endParaRPr>
+          </a:p>
+        </p:txBody>
+      </p:sp>
+      <p:pic>
+        <p:nvPicPr>
+          <p:cNvPr id="8" name="Picture 7" descr="A screenshot of a computer&#10;&#10;Description automatically generated">
+            <a:extLst>
+              <a:ext uri="{FF2B5EF4-FFF2-40B4-BE49-F238E27FC236}">
+                <a16:creationId xmlns:a16="http://schemas.microsoft.com/office/drawing/2014/main" id="{F4BE3BC9-9E56-7469-364B-7ED85A56B4D9}"/>
+              </a:ext>
+            </a:extLst>
+          </p:cNvPr>
+          <p:cNvPicPr>
+            <a:picLocks noChangeAspect="1"/>
+          </p:cNvPicPr>
+          <p:nvPr/>
+        </p:nvPicPr>
+        <p:blipFill rotWithShape="1">
+          <a:blip r:embed="rId2"/>
+          <a:srcRect t="16185" r="-2" b="6324"/>
+          <a:stretch/>
+        </p:blipFill>
+        <p:spPr>
+          <a:xfrm>
+            <a:off x="7901259" y="2727729"/>
+            <a:ext cx="4290741" cy="4130271"/>
+          </a:xfrm>
+          <a:custGeom>
+            <a:avLst/>
+            <a:gdLst/>
+            <a:ahLst/>
+            <a:cxnLst/>
+            <a:rect l="l" t="t" r="r" b="b"/>
+            <a:pathLst>
+              <a:path w="4290741" h="4130271">
+                <a:moveTo>
+                  <a:pt x="2503809" y="0"/>
+                </a:moveTo>
+                <a:cubicBezTo>
+                  <a:pt x="3157405" y="0"/>
+                  <a:pt x="3752509" y="250434"/>
+                  <a:pt x="4198398" y="660580"/>
+                </a:cubicBezTo>
+                <a:lnTo>
+                  <a:pt x="4290741" y="751286"/>
+                </a:lnTo>
+                <a:lnTo>
+                  <a:pt x="4290741" y="4130271"/>
+                </a:lnTo>
+                <a:lnTo>
+                  <a:pt x="604508" y="4130271"/>
+                </a:lnTo>
+                <a:lnTo>
+                  <a:pt x="461940" y="3953232"/>
+                </a:lnTo>
+                <a:cubicBezTo>
+                  <a:pt x="171051" y="3544183"/>
+                  <a:pt x="0" y="3043971"/>
+                  <a:pt x="0" y="2503809"/>
+                </a:cubicBezTo>
+                <a:cubicBezTo>
+                  <a:pt x="0" y="1120992"/>
+                  <a:pt x="1120992" y="0"/>
+                  <a:pt x="2503809" y="0"/>
+                </a:cubicBezTo>
+                <a:close/>
+              </a:path>
+            </a:pathLst>
+          </a:custGeom>
+        </p:spPr>
+      </p:pic>
+      <p:sp>
+        <p:nvSpPr>
+          <p:cNvPr id="17" name="Arc 16">
+            <a:extLst>
+              <a:ext uri="{FF2B5EF4-FFF2-40B4-BE49-F238E27FC236}">
+                <a16:creationId xmlns:a16="http://schemas.microsoft.com/office/drawing/2014/main" id="{70BEB1E7-2F88-40BC-B73D-42E5B6F80BFC}"/>
+              </a:ext>
+              <a:ext uri="{C183D7F6-B498-43B3-948B-1728B52AA6E4}">
+                <adec:decorative xmlns:adec="http://schemas.microsoft.com/office/drawing/2017/decorative" val="1"/>
+              </a:ext>
+            </a:extLst>
+          </p:cNvPr>
+          <p:cNvSpPr>
+            <a:spLocks noGrp="1" noRot="1" noChangeAspect="1" noMove="1" noResize="1" noEditPoints="1" noAdjustHandles="1" noChangeArrowheads="1" noChangeShapeType="1" noTextEdit="1"/>
+          </p:cNvSpPr>
+          <p:nvPr>
+            <p:extLst>
+              <p:ext uri="{386F3935-93C4-4BCD-93E2-E3B085C9AB24}">
+                <p16:designElem xmlns:p16="http://schemas.microsoft.com/office/powerpoint/2015/main" val="1"/>
+              </p:ext>
+            </p:extLst>
+          </p:nvPr>
+        </p:nvSpPr>
+        <p:spPr>
+          <a:xfrm rot="4759070" flipV="1">
+            <a:off x="6034138" y="-673140"/>
+            <a:ext cx="4021193" cy="4021193"/>
+          </a:xfrm>
+          <a:prstGeom prst="arc">
+            <a:avLst>
+              <a:gd name="adj1" fmla="val 16200000"/>
+              <a:gd name="adj2" fmla="val 20093138"/>
+            </a:avLst>
+          </a:prstGeom>
+          <a:ln w="127000" cap="rnd">
+            <a:solidFill>
+              <a:schemeClr val="accent4"/>
+            </a:solidFill>
+            <a:prstDash val="dash"/>
+          </a:ln>
+        </p:spPr>
+        <p:style>
+          <a:lnRef idx="1">
+            <a:schemeClr val="accent1"/>
+          </a:lnRef>
+          <a:fillRef idx="0">
+            <a:schemeClr val="accent1"/>
+          </a:fillRef>
+          <a:effectRef idx="0">
+            <a:schemeClr val="accent1"/>
+          </a:effectRef>
+          <a:fontRef idx="minor">
+            <a:schemeClr val="tx1"/>
+          </a:fontRef>
+        </p:style>
+        <p:txBody>
+          <a:bodyPr rtlCol="0" anchor="ctr"/>
+          <a:lstStyle/>
+          <a:p>
+            <a:pPr algn="ctr"/>
+            <a:endParaRPr lang="en-US" dirty="0"/>
+          </a:p>
+        </p:txBody>
+      </p:sp>
+      <p:pic>
+        <p:nvPicPr>
+          <p:cNvPr id="6" name="Picture 5" descr="A screenshot of a computer&#10;&#10;Description automatically generated">
+            <a:extLst>
+              <a:ext uri="{FF2B5EF4-FFF2-40B4-BE49-F238E27FC236}">
+                <a16:creationId xmlns:a16="http://schemas.microsoft.com/office/drawing/2014/main" id="{98C88DA3-E094-7086-D565-566689DBAAA7}"/>
+              </a:ext>
+            </a:extLst>
+          </p:cNvPr>
+          <p:cNvPicPr>
+            <a:picLocks noChangeAspect="1"/>
+          </p:cNvPicPr>
+          <p:nvPr/>
+        </p:nvPicPr>
+        <p:blipFill rotWithShape="1">
+          <a:blip r:embed="rId3"/>
+          <a:srcRect l="1723" r="30707" b="-2"/>
+          <a:stretch/>
+        </p:blipFill>
+        <p:spPr>
+          <a:xfrm>
+            <a:off x="6261607" y="1"/>
+            <a:ext cx="3519312" cy="3007909"/>
+          </a:xfrm>
+          <a:custGeom>
+            <a:avLst/>
+            <a:gdLst/>
+            <a:ahLst/>
+            <a:cxnLst/>
+            <a:rect l="l" t="t" r="r" b="b"/>
+            <a:pathLst>
+              <a:path w="3519312" h="3007909">
+                <a:moveTo>
+                  <a:pt x="519780" y="0"/>
+                </a:moveTo>
+                <a:lnTo>
+                  <a:pt x="2999532" y="0"/>
+                </a:lnTo>
+                <a:lnTo>
+                  <a:pt x="3003921" y="3989"/>
+                </a:lnTo>
+                <a:cubicBezTo>
+                  <a:pt x="3322356" y="322424"/>
+                  <a:pt x="3519312" y="762338"/>
+                  <a:pt x="3519312" y="1248253"/>
+                </a:cubicBezTo>
+                <a:cubicBezTo>
+                  <a:pt x="3519312" y="2220084"/>
+                  <a:pt x="2731487" y="3007909"/>
+                  <a:pt x="1759656" y="3007909"/>
+                </a:cubicBezTo>
+                <a:cubicBezTo>
+                  <a:pt x="787826" y="3007909"/>
+                  <a:pt x="0" y="2220084"/>
+                  <a:pt x="0" y="1248253"/>
+                </a:cubicBezTo>
+                <a:cubicBezTo>
+                  <a:pt x="0" y="762338"/>
+                  <a:pt x="196957" y="322424"/>
+                  <a:pt x="515392" y="3989"/>
+                </a:cubicBezTo>
+                <a:close/>
+              </a:path>
+            </a:pathLst>
+          </a:custGeom>
+        </p:spPr>
+      </p:pic>
+    </p:spTree>
+    <p:extLst>
+      <p:ext uri="{BB962C8B-B14F-4D97-AF65-F5344CB8AC3E}">
+        <p14:creationId xmlns:p14="http://schemas.microsoft.com/office/powerpoint/2010/main" val="3738088114"/>
+      </p:ext>
+    </p:extLst>
+  </p:cSld>
+  <p:clrMapOvr>
+    <a:masterClrMapping/>
+  </p:clrMapOvr>
+</p:sld>
+</file>
+
+<file path=ppt/slides/slide4.xml><?xml version="1.0" encoding="utf-8"?>
+<p:sld xmlns:a="http://schemas.openxmlformats.org/drawingml/2006/main" xmlns:r="http://schemas.openxmlformats.org/officeDocument/2006/relationships" xmlns:p="http://schemas.openxmlformats.org/presentationml/2006/main">
+  <p:cSld>
+    <p:spTree>
+      <p:nvGrpSpPr>
+        <p:cNvPr id="1" name=""/>
+        <p:cNvGrpSpPr/>
+        <p:nvPr/>
+      </p:nvGrpSpPr>
+      <p:grpSpPr>
+        <a:xfrm>
+          <a:off x="0" y="0"/>
+          <a:ext cx="0" cy="0"/>
+          <a:chOff x="0" y="0"/>
+          <a:chExt cx="0" cy="0"/>
+        </a:xfrm>
+      </p:grpSpPr>
+      <p:sp>
+        <p:nvSpPr>
+          <p:cNvPr id="2" name="Title 1">
+            <a:extLst>
+              <a:ext uri="{FF2B5EF4-FFF2-40B4-BE49-F238E27FC236}">
+                <a16:creationId xmlns:a16="http://schemas.microsoft.com/office/drawing/2014/main" id="{3C60AE25-4594-9811-3881-31068557E4AE}"/>
+              </a:ext>
+            </a:extLst>
+          </p:cNvPr>
+          <p:cNvSpPr>
+            <a:spLocks noGrp="1"/>
+          </p:cNvSpPr>
+          <p:nvPr>
+            <p:ph type="title"/>
+          </p:nvPr>
+        </p:nvSpPr>
+        <p:spPr/>
+        <p:txBody>
+          <a:bodyPr/>
+          <a:lstStyle/>
+          <a:p>
+            <a:r>
+              <a:rPr lang="en-US" dirty="0"/>
+              <a:t>Obstacles </a:t>
+            </a:r>
+            <a:endParaRPr lang="en-AU" dirty="0"/>
+          </a:p>
+        </p:txBody>
+      </p:sp>
+      <p:sp>
+        <p:nvSpPr>
+          <p:cNvPr id="3" name="Content Placeholder 2">
+            <a:extLst>
+              <a:ext uri="{FF2B5EF4-FFF2-40B4-BE49-F238E27FC236}">
+                <a16:creationId xmlns:a16="http://schemas.microsoft.com/office/drawing/2014/main" id="{4003CD52-8AC9-8819-57B5-8E18C1FA6C48}"/>
+              </a:ext>
+            </a:extLst>
+          </p:cNvPr>
+          <p:cNvSpPr>
+            <a:spLocks noGrp="1"/>
+          </p:cNvSpPr>
+          <p:nvPr>
+            <p:ph idx="1"/>
+          </p:nvPr>
+        </p:nvSpPr>
+        <p:spPr/>
+        <p:txBody>
+          <a:bodyPr/>
+          <a:lstStyle/>
+          <a:p>
+            <a:r>
+              <a:rPr lang="en-US" dirty="0"/>
+              <a:t>Time</a:t>
+            </a:r>
+          </a:p>
+          <a:p>
+            <a:r>
+              <a:rPr lang="en-US" dirty="0"/>
+              <a:t>Virtual Machine test Environment.</a:t>
+            </a:r>
+          </a:p>
+          <a:p>
+            <a:endParaRPr lang="en-US" dirty="0"/>
+          </a:p>
+          <a:p>
+            <a:endParaRPr lang="en-US" dirty="0"/>
+          </a:p>
+        </p:txBody>
+      </p:sp>
+    </p:spTree>
+    <p:extLst>
+      <p:ext uri="{BB962C8B-B14F-4D97-AF65-F5344CB8AC3E}">
+        <p14:creationId xmlns:p14="http://schemas.microsoft.com/office/powerpoint/2010/main" val="3035286301"/>
+      </p:ext>
+    </p:extLst>
+  </p:cSld>
+  <p:clrMapOvr>
+    <a:masterClrMapping/>
+  </p:clrMapOvr>
+</p:sld>
+</file>
+
+<file path=ppt/slides/slide5.xml><?xml version="1.0" encoding="utf-8"?>
+<p:sld xmlns:a="http://schemas.openxmlformats.org/drawingml/2006/main" xmlns:r="http://schemas.openxmlformats.org/officeDocument/2006/relationships" xmlns:p="http://schemas.openxmlformats.org/presentationml/2006/main">
+  <p:cSld>
+    <p:spTree>
+      <p:nvGrpSpPr>
+        <p:cNvPr id="1" name=""/>
+        <p:cNvGrpSpPr/>
+        <p:nvPr/>
+      </p:nvGrpSpPr>
+      <p:grpSpPr>
+        <a:xfrm>
+          <a:off x="0" y="0"/>
+          <a:ext cx="0" cy="0"/>
+          <a:chOff x="0" y="0"/>
+          <a:chExt cx="0" cy="0"/>
+        </a:xfrm>
+      </p:grpSpPr>
+      <p:sp>
+        <p:nvSpPr>
+          <p:cNvPr id="2" name="Title 1">
+            <a:extLst>
+              <a:ext uri="{FF2B5EF4-FFF2-40B4-BE49-F238E27FC236}">
+                <a16:creationId xmlns:a16="http://schemas.microsoft.com/office/drawing/2014/main" id="{FE139BE3-30DA-5011-18D4-32D586A10EDD}"/>
+              </a:ext>
+            </a:extLst>
+          </p:cNvPr>
+          <p:cNvSpPr>
+            <a:spLocks noGrp="1"/>
+          </p:cNvSpPr>
+          <p:nvPr>
+            <p:ph type="title"/>
+          </p:nvPr>
+        </p:nvSpPr>
+        <p:spPr/>
+        <p:txBody>
+          <a:bodyPr/>
+          <a:lstStyle/>
+          <a:p>
+            <a:r>
+              <a:rPr lang="en-US" dirty="0" err="1"/>
+              <a:t>TestWDAC</a:t>
+            </a:r>
+            <a:r>
+              <a:rPr lang="en-US" dirty="0"/>
+              <a:t>()</a:t>
+            </a:r>
+            <a:endParaRPr lang="en-AU" dirty="0"/>
+          </a:p>
+        </p:txBody>
+      </p:sp>
+      <p:sp>
+        <p:nvSpPr>
+          <p:cNvPr id="3" name="Content Placeholder 2">
+            <a:extLst>
+              <a:ext uri="{FF2B5EF4-FFF2-40B4-BE49-F238E27FC236}">
+                <a16:creationId xmlns:a16="http://schemas.microsoft.com/office/drawing/2014/main" id="{C8A9C6DC-1309-1A79-8B4D-C7A38629D659}"/>
+              </a:ext>
+            </a:extLst>
+          </p:cNvPr>
+          <p:cNvSpPr>
+            <a:spLocks noGrp="1"/>
+          </p:cNvSpPr>
+          <p:nvPr>
+            <p:ph idx="1"/>
+          </p:nvPr>
+        </p:nvSpPr>
+        <p:spPr/>
+        <p:txBody>
+          <a:bodyPr/>
+          <a:lstStyle/>
+          <a:p>
+            <a:endParaRPr lang="en-AU"/>
+          </a:p>
+        </p:txBody>
+      </p:sp>
+    </p:spTree>
+    <p:extLst>
+      <p:ext uri="{BB962C8B-B14F-4D97-AF65-F5344CB8AC3E}">
+        <p14:creationId xmlns:p14="http://schemas.microsoft.com/office/powerpoint/2010/main" val="996890133"/>
+      </p:ext>
+    </p:extLst>
+  </p:cSld>
+  <p:clrMapOvr>
+    <a:masterClrMapping/>
+  </p:clrMapOvr>
+</p:sld>
+</file>
+
+<file path=ppt/slides/slide6.xml><?xml version="1.0" encoding="utf-8"?>
+<p:sld xmlns:a="http://schemas.openxmlformats.org/drawingml/2006/main" xmlns:r="http://schemas.openxmlformats.org/officeDocument/2006/relationships" xmlns:p="http://schemas.openxmlformats.org/presentationml/2006/main">
+  <p:cSld>
+    <p:spTree>
+      <p:nvGrpSpPr>
+        <p:cNvPr id="1" name=""/>
+        <p:cNvGrpSpPr/>
+        <p:nvPr/>
+      </p:nvGrpSpPr>
+      <p:grpSpPr>
+        <a:xfrm>
+          <a:off x="0" y="0"/>
+          <a:ext cx="0" cy="0"/>
+          <a:chOff x="0" y="0"/>
+          <a:chExt cx="0" cy="0"/>
+        </a:xfrm>
+      </p:grpSpPr>
+      <p:sp>
+        <p:nvSpPr>
+          <p:cNvPr id="2" name="Title 1">
+            <a:extLst>
+              <a:ext uri="{FF2B5EF4-FFF2-40B4-BE49-F238E27FC236}">
+                <a16:creationId xmlns:a16="http://schemas.microsoft.com/office/drawing/2014/main" id="{81324514-B9CB-AF0B-3C6D-D1EBA2823D92}"/>
+              </a:ext>
+            </a:extLst>
+          </p:cNvPr>
+          <p:cNvSpPr>
+            <a:spLocks noGrp="1"/>
+          </p:cNvSpPr>
+          <p:nvPr>
+            <p:ph type="title"/>
+          </p:nvPr>
+        </p:nvSpPr>
+        <p:spPr/>
+        <p:txBody>
+          <a:bodyPr/>
+          <a:lstStyle/>
+          <a:p>
+            <a:r>
+              <a:rPr lang="en-US" sz="4400" dirty="0" err="1"/>
+              <a:t>setupWDAC</a:t>
+            </a:r>
+            <a:r>
+              <a:rPr lang="en-US" sz="4400" dirty="0"/>
+              <a:t>()</a:t>
+            </a:r>
+            <a:endParaRPr lang="en-AU" dirty="0"/>
+          </a:p>
+        </p:txBody>
+      </p:sp>
+      <p:sp>
+        <p:nvSpPr>
+          <p:cNvPr id="3" name="Content Placeholder 2">
+            <a:extLst>
+              <a:ext uri="{FF2B5EF4-FFF2-40B4-BE49-F238E27FC236}">
+                <a16:creationId xmlns:a16="http://schemas.microsoft.com/office/drawing/2014/main" id="{644DB0E5-5B36-FDBF-AB03-026213A6DDE0}"/>
+              </a:ext>
+            </a:extLst>
+          </p:cNvPr>
+          <p:cNvSpPr>
+            <a:spLocks noGrp="1"/>
+          </p:cNvSpPr>
+          <p:nvPr>
+            <p:ph idx="1"/>
+          </p:nvPr>
+        </p:nvSpPr>
+        <p:spPr/>
+        <p:txBody>
+          <a:bodyPr/>
+          <a:lstStyle/>
+          <a:p>
+            <a:endParaRPr lang="en-AU" dirty="0"/>
+          </a:p>
+        </p:txBody>
+      </p:sp>
+    </p:spTree>
+    <p:extLst>
+      <p:ext uri="{BB962C8B-B14F-4D97-AF65-F5344CB8AC3E}">
+        <p14:creationId xmlns:p14="http://schemas.microsoft.com/office/powerpoint/2010/main" val="691685336"/>
+      </p:ext>
+    </p:extLst>
+  </p:cSld>
+  <p:clrMapOvr>
+    <a:masterClrMapping/>
+  </p:clrMapOvr>
+</p:sld>
+</file>
+
+<file path=ppt/slides/slide7.xml><?xml version="1.0" encoding="utf-8"?>
+<p:sld xmlns:a="http://schemas.openxmlformats.org/drawingml/2006/main" xmlns:r="http://schemas.openxmlformats.org/officeDocument/2006/relationships" xmlns:p="http://schemas.openxmlformats.org/presentationml/2006/main">
+  <p:cSld>
+    <p:spTree>
+      <p:nvGrpSpPr>
+        <p:cNvPr id="1" name=""/>
+        <p:cNvGrpSpPr/>
+        <p:nvPr/>
+      </p:nvGrpSpPr>
+      <p:grpSpPr>
+        <a:xfrm>
+          <a:off x="0" y="0"/>
+          <a:ext cx="0" cy="0"/>
+          <a:chOff x="0" y="0"/>
+          <a:chExt cx="0" cy="0"/>
+        </a:xfrm>
+      </p:grpSpPr>
+      <p:sp>
+        <p:nvSpPr>
+          <p:cNvPr id="2" name="Title 1">
+            <a:extLst>
+              <a:ext uri="{FF2B5EF4-FFF2-40B4-BE49-F238E27FC236}">
+                <a16:creationId xmlns:a16="http://schemas.microsoft.com/office/drawing/2014/main" id="{5947227B-19E7-3DE2-7386-7F37313C2667}"/>
+              </a:ext>
+            </a:extLst>
+          </p:cNvPr>
+          <p:cNvSpPr>
+            <a:spLocks noGrp="1"/>
+          </p:cNvSpPr>
+          <p:nvPr>
+            <p:ph type="title"/>
+          </p:nvPr>
+        </p:nvSpPr>
+        <p:spPr/>
+        <p:txBody>
+          <a:bodyPr/>
+          <a:lstStyle/>
+          <a:p>
+            <a:r>
+              <a:rPr lang="en-US" sz="4400" dirty="0" err="1"/>
+              <a:t>enableWDAC</a:t>
+            </a:r>
+            <a:r>
+              <a:rPr lang="en-US" sz="4400" dirty="0"/>
+              <a:t>()</a:t>
+            </a:r>
+            <a:endParaRPr lang="en-AU" dirty="0"/>
+          </a:p>
+        </p:txBody>
+      </p:sp>
+      <p:sp>
+        <p:nvSpPr>
+          <p:cNvPr id="3" name="Content Placeholder 2">
+            <a:extLst>
+              <a:ext uri="{FF2B5EF4-FFF2-40B4-BE49-F238E27FC236}">
+                <a16:creationId xmlns:a16="http://schemas.microsoft.com/office/drawing/2014/main" id="{A416DA9C-B0C9-98B5-BE41-0A7CFCF5942F}"/>
+              </a:ext>
+            </a:extLst>
+          </p:cNvPr>
+          <p:cNvSpPr>
+            <a:spLocks noGrp="1"/>
+          </p:cNvSpPr>
+          <p:nvPr>
+            <p:ph idx="1"/>
+          </p:nvPr>
+        </p:nvSpPr>
+        <p:spPr/>
+        <p:txBody>
+          <a:bodyPr/>
+          <a:lstStyle/>
+          <a:p>
+            <a:endParaRPr lang="en-AU"/>
+          </a:p>
+        </p:txBody>
+      </p:sp>
+    </p:spTree>
+    <p:extLst>
+      <p:ext uri="{BB962C8B-B14F-4D97-AF65-F5344CB8AC3E}">
+        <p14:creationId xmlns:p14="http://schemas.microsoft.com/office/powerpoint/2010/main" val="1594782237"/>
+      </p:ext>
+    </p:extLst>
+  </p:cSld>
+  <p:clrMapOvr>
+    <a:masterClrMapping/>
+  </p:clrMapOvr>
+</p:sld>
+</file>
+
+<file path=ppt/slides/slide8.xml><?xml version="1.0" encoding="utf-8"?>
+<p:sld xmlns:a="http://schemas.openxmlformats.org/drawingml/2006/main" xmlns:r="http://schemas.openxmlformats.org/officeDocument/2006/relationships" xmlns:p="http://schemas.openxmlformats.org/presentationml/2006/main">
+  <p:cSld>
+    <p:spTree>
+      <p:nvGrpSpPr>
+        <p:cNvPr id="1" name=""/>
+        <p:cNvGrpSpPr/>
+        <p:nvPr/>
+      </p:nvGrpSpPr>
+      <p:grpSpPr>
+        <a:xfrm>
+          <a:off x="0" y="0"/>
+          <a:ext cx="0" cy="0"/>
+          <a:chOff x="0" y="0"/>
+          <a:chExt cx="0" cy="0"/>
+        </a:xfrm>
+      </p:grpSpPr>
+      <p:sp>
+        <p:nvSpPr>
+          <p:cNvPr id="2" name="Title 1">
+            <a:extLst>
+              <a:ext uri="{FF2B5EF4-FFF2-40B4-BE49-F238E27FC236}">
+                <a16:creationId xmlns:a16="http://schemas.microsoft.com/office/drawing/2014/main" id="{251F01AB-181D-E057-DD7A-5851BC1836E1}"/>
+              </a:ext>
+            </a:extLst>
+          </p:cNvPr>
+          <p:cNvSpPr>
+            <a:spLocks noGrp="1"/>
+          </p:cNvSpPr>
+          <p:nvPr>
+            <p:ph type="title"/>
+          </p:nvPr>
+        </p:nvSpPr>
+        <p:spPr/>
+        <p:txBody>
+          <a:bodyPr/>
+          <a:lstStyle/>
+          <a:p>
+            <a:r>
+              <a:rPr lang="en-US" sz="4400" dirty="0" err="1"/>
+              <a:t>resetWDAC</a:t>
+            </a:r>
+            <a:r>
+              <a:rPr lang="en-US" sz="4400" dirty="0"/>
+              <a:t>()</a:t>
+            </a:r>
+            <a:endParaRPr lang="en-AU" dirty="0"/>
+          </a:p>
+        </p:txBody>
+      </p:sp>
+      <p:sp>
+        <p:nvSpPr>
+          <p:cNvPr id="3" name="Content Placeholder 2">
+            <a:extLst>
+              <a:ext uri="{FF2B5EF4-FFF2-40B4-BE49-F238E27FC236}">
+                <a16:creationId xmlns:a16="http://schemas.microsoft.com/office/drawing/2014/main" id="{D68E6C09-F229-BB1D-6ECE-8C9B66DC772C}"/>
+              </a:ext>
+            </a:extLst>
+          </p:cNvPr>
+          <p:cNvSpPr>
+            <a:spLocks noGrp="1"/>
+          </p:cNvSpPr>
+          <p:nvPr>
+            <p:ph idx="1"/>
+          </p:nvPr>
+        </p:nvSpPr>
+        <p:spPr/>
+        <p:txBody>
+          <a:bodyPr/>
+          <a:lstStyle/>
+          <a:p>
+            <a:endParaRPr lang="en-AU"/>
+          </a:p>
+        </p:txBody>
+      </p:sp>
+    </p:spTree>
+    <p:extLst>
+      <p:ext uri="{BB962C8B-B14F-4D97-AF65-F5344CB8AC3E}">
+        <p14:creationId xmlns:p14="http://schemas.microsoft.com/office/powerpoint/2010/main" val="1356853145"/>
+      </p:ext>
+    </p:extLst>
+  </p:cSld>
+  <p:clrMapOvr>
+    <a:masterClrMapping/>
+  </p:clrMapOvr>
+</p:sld>
+</file>
+
+<file path=ppt/slides/slide9.xml><?xml version="1.0" encoding="utf-8"?>
+<p:sld xmlns:a="http://schemas.openxmlformats.org/drawingml/2006/main" xmlns:r="http://schemas.openxmlformats.org/officeDocument/2006/relationships" xmlns:p="http://schemas.openxmlformats.org/presentationml/2006/main">
+  <p:cSld>
+    <p:spTree>
+      <p:nvGrpSpPr>
+        <p:cNvPr id="1" name=""/>
+        <p:cNvGrpSpPr/>
+        <p:nvPr/>
+      </p:nvGrpSpPr>
+      <p:grpSpPr>
+        <a:xfrm>
+          <a:off x="0" y="0"/>
+          <a:ext cx="0" cy="0"/>
+          <a:chOff x="0" y="0"/>
+          <a:chExt cx="0" cy="0"/>
+        </a:xfrm>
+      </p:grpSpPr>
+      <p:sp>
+        <p:nvSpPr>
+          <p:cNvPr id="2" name="Title 1">
+            <a:extLst>
+              <a:ext uri="{FF2B5EF4-FFF2-40B4-BE49-F238E27FC236}">
+                <a16:creationId xmlns:a16="http://schemas.microsoft.com/office/drawing/2014/main" id="{2A57C4C7-B87A-417D-44B4-90A72FA8AC23}"/>
+              </a:ext>
+            </a:extLst>
+          </p:cNvPr>
+          <p:cNvSpPr>
+            <a:spLocks noGrp="1"/>
+          </p:cNvSpPr>
+          <p:nvPr>
+            <p:ph type="title"/>
+          </p:nvPr>
+        </p:nvSpPr>
+        <p:spPr/>
+        <p:txBody>
+          <a:bodyPr/>
+          <a:lstStyle/>
+          <a:p>
+            <a:r>
+              <a:rPr lang="en-US" dirty="0"/>
+              <a:t>Implementation </a:t>
+            </a:r>
+            <a:r>
+              <a:rPr lang="en-US" dirty="0" err="1"/>
+              <a:t>Tetsting</a:t>
+            </a:r>
+            <a:endParaRPr lang="en-AU" dirty="0"/>
+          </a:p>
+        </p:txBody>
+      </p:sp>
+      <p:sp>
+        <p:nvSpPr>
+          <p:cNvPr id="3" name="Content Placeholder 2">
+            <a:extLst>
+              <a:ext uri="{FF2B5EF4-FFF2-40B4-BE49-F238E27FC236}">
+                <a16:creationId xmlns:a16="http://schemas.microsoft.com/office/drawing/2014/main" id="{0657674D-48A9-E03A-459A-60DFD2DD9A0E}"/>
+              </a:ext>
+            </a:extLst>
+          </p:cNvPr>
+          <p:cNvSpPr>
+            <a:spLocks noGrp="1"/>
+          </p:cNvSpPr>
+          <p:nvPr>
+            <p:ph idx="1"/>
+          </p:nvPr>
+        </p:nvSpPr>
+        <p:spPr/>
+        <p:txBody>
+          <a:bodyPr/>
+          <a:lstStyle/>
+          <a:p>
+            <a:endParaRPr lang="en-AU"/>
+          </a:p>
+        </p:txBody>
+      </p:sp>
+    </p:spTree>
+    <p:extLst>
+      <p:ext uri="{BB962C8B-B14F-4D97-AF65-F5344CB8AC3E}">
+        <p14:creationId xmlns:p14="http://schemas.microsoft.com/office/powerpoint/2010/main" val="862906537"/>
       </p:ext>
     </p:extLst>
   </p:cSld>

--- a/Coit11241 Cyber Security Technologies/peer programing/peer programing presentation.pptx
+++ b/Coit11241 Cyber Security Technologies/peer programing/peer programing presentation.pptx
@@ -5,18 +5,12 @@
     <p:sldMasterId id="2147483648" r:id="rId1"/>
   </p:sldMasterIdLst>
   <p:notesMasterIdLst>
-    <p:notesMasterId r:id="rId11"/>
+    <p:notesMasterId r:id="rId5"/>
   </p:notesMasterIdLst>
   <p:sldIdLst>
     <p:sldId id="256" r:id="rId2"/>
     <p:sldId id="257" r:id="rId3"/>
     <p:sldId id="258" r:id="rId4"/>
-    <p:sldId id="260" r:id="rId5"/>
-    <p:sldId id="259" r:id="rId6"/>
-    <p:sldId id="261" r:id="rId7"/>
-    <p:sldId id="262" r:id="rId8"/>
-    <p:sldId id="263" r:id="rId9"/>
-    <p:sldId id="264" r:id="rId10"/>
   </p:sldIdLst>
   <p:sldSz cx="12192000" cy="6858000"/>
   <p:notesSz cx="6858000" cy="9144000"/>
@@ -4736,7 +4730,7 @@
         </p:spPr>
         <p:txBody>
           <a:bodyPr vert="horz" lIns="91440" tIns="45720" rIns="91440" bIns="45720" rtlCol="0">
-            <a:normAutofit/>
+            <a:normAutofit lnSpcReduction="10000"/>
           </a:bodyPr>
           <a:lstStyle/>
           <a:p>
@@ -4751,19 +4745,39 @@
           <a:p>
             <a:r>
               <a:rPr lang="en-US" sz="1300" b="0" i="0" u="none" strike="noStrike" baseline="0" dirty="0"/>
-              <a:t>You work at the Monto Caravan and Cabin Park. </a:t>
-            </a:r>
-          </a:p>
-          <a:p>
+              <a:t>Our client is </a:t>
+            </a:r>
+            <a:r>
+              <a:rPr lang="en-US" sz="1300" dirty="0"/>
+              <a:t>the Business Owner of</a:t>
+            </a:r>
             <a:r>
               <a:rPr lang="en-US" sz="1300" b="0" i="0" u="none" strike="noStrike" baseline="0" dirty="0"/>
-              <a:t>Your boss has asked you to improve the cybersecurity of her workstation. </a:t>
+              <a:t> the “Monto Caravan and Cabin Park”. </a:t>
             </a:r>
           </a:p>
           <a:p>
             <a:r>
               <a:rPr lang="en-US" sz="1300" dirty="0"/>
-              <a:t>D</a:t>
+              <a:t>The Business Owner</a:t>
+            </a:r>
+            <a:r>
+              <a:rPr lang="en-US" sz="1300" b="0" i="0" u="none" strike="noStrike" baseline="0" dirty="0"/>
+              <a:t> has </a:t>
+            </a:r>
+            <a:r>
+              <a:rPr lang="en-US" sz="1300" dirty="0"/>
+              <a:t>requested we</a:t>
+            </a:r>
+            <a:r>
+              <a:rPr lang="en-US" sz="1300" b="0" i="0" u="none" strike="noStrike" baseline="0" dirty="0"/>
+              <a:t> improve the cybersecurity of her workstation. </a:t>
+            </a:r>
+          </a:p>
+          <a:p>
+            <a:r>
+              <a:rPr lang="en-US" sz="1300" dirty="0"/>
+              <a:t>We must d</a:t>
             </a:r>
             <a:r>
               <a:rPr lang="en-US" sz="1300" b="0" i="0" u="none" strike="noStrike" baseline="0" dirty="0"/>
@@ -4772,22 +4786,26 @@
           </a:p>
           <a:p>
             <a:r>
+              <a:rPr lang="en-US" sz="1300" dirty="0"/>
+              <a:t>The end user utilizes </a:t>
+            </a:r>
+            <a:r>
               <a:rPr lang="en-US" sz="1300" b="0" i="0" u="none" strike="noStrike" baseline="0" dirty="0"/>
-              <a:t>Your boss uses the Win11 virtual machine</a:t>
+              <a:t> a windows 11 workstation.</a:t>
             </a:r>
           </a:p>
           <a:p>
             <a:r>
               <a:rPr lang="en-US" sz="1300" b="0" i="0" u="none" strike="noStrike" baseline="0" dirty="0"/>
-              <a:t>To implement an allowlist of </a:t>
-            </a:r>
-            <a:r>
-              <a:rPr lang="en-US" sz="1300" b="0" i="0" u="none" strike="noStrike" baseline="0" dirty="0" err="1"/>
-              <a:t>authorised</a:t>
+              <a:t>The task is to implement a solution to increase the security of her </a:t>
+            </a:r>
+            <a:r>
+              <a:rPr lang="en-US" sz="1300" dirty="0"/>
+              <a:t>workstation</a:t>
             </a:r>
             <a:r>
               <a:rPr lang="en-US" sz="1300" b="0" i="0" u="none" strike="noStrike" baseline="0" dirty="0"/>
-              <a:t> software you will configure Windows Defender Application Control (WDAC) in Win11. </a:t>
+              <a:t>. </a:t>
             </a:r>
             <a:endParaRPr lang="en-US" sz="1300" dirty="0"/>
           </a:p>
@@ -4818,7 +4836,7 @@
         </p:spPr>
         <p:txBody>
           <a:bodyPr vert="horz" lIns="91440" tIns="45720" rIns="91440" bIns="45720" rtlCol="0">
-            <a:normAutofit lnSpcReduction="10000"/>
+            <a:normAutofit/>
           </a:bodyPr>
           <a:lstStyle>
             <a:lvl1pPr marL="228600" indent="-228600" algn="l" defTabSz="914400" rtl="0" eaLnBrk="1" latinLnBrk="0" hangingPunct="1">
@@ -4990,7 +5008,13 @@
             </a:pPr>
             <a:r>
               <a:rPr lang="en-US" sz="1600" b="1" dirty="0"/>
-              <a:t>Task</a:t>
+              <a:t>Our Solution</a:t>
+            </a:r>
+          </a:p>
+          <a:p>
+            <a:r>
+              <a:rPr lang="en-US" sz="1300" dirty="0"/>
+              <a:t>Create a PowerShell script that implements an app allowlist using WDAC</a:t>
             </a:r>
           </a:p>
           <a:p>
@@ -5041,22 +5065,6 @@
             <a:r>
               <a:rPr lang="en-US" sz="1300" dirty="0"/>
               <a:t>() – removed the block policy.</a:t>
-            </a:r>
-          </a:p>
-          <a:p>
-            <a:r>
-              <a:rPr lang="en-US" sz="1300" dirty="0" err="1"/>
-              <a:t>Utilise</a:t>
-            </a:r>
-            <a:r>
-              <a:rPr lang="en-US" sz="1300" dirty="0"/>
-              <a:t> GitHub for version control, project management &amp; peer programing.</a:t>
-            </a:r>
-          </a:p>
-          <a:p>
-            <a:r>
-              <a:rPr lang="en-US" sz="1300" dirty="0"/>
-              <a:t>Test the solution and present to stake holders.</a:t>
             </a:r>
           </a:p>
           <a:p>
@@ -5237,7 +5245,7 @@
           <a:p>
             <a:r>
               <a:rPr lang="en-US" sz="1500" dirty="0"/>
-              <a:t>Used to work on the same project at different times.</a:t>
+              <a:t>We utilized Git-Hub to work on the same project at different times.</a:t>
             </a:r>
           </a:p>
           <a:p>
@@ -5264,7 +5272,15 @@
           <a:p>
             <a:r>
               <a:rPr lang="en-US" sz="1500" dirty="0"/>
-              <a:t>We used projects within Git Hub to manage what need to be done and who is responsible.</a:t>
+              <a:t>We </a:t>
+            </a:r>
+            <a:r>
+              <a:rPr lang="en-US" sz="1500" dirty="0" err="1"/>
+              <a:t>utilised</a:t>
+            </a:r>
+            <a:r>
+              <a:rPr lang="en-US" sz="1500" dirty="0"/>
+              <a:t> projects within Git Hub to manage what need to be done and who is responsible.</a:t>
             </a:r>
           </a:p>
           <a:p>
@@ -5279,7 +5295,7 @@
           <a:p>
             <a:r>
               <a:rPr lang="en-US" sz="1500" dirty="0"/>
-              <a:t>We used teams for our talk about channel, as well as our meeting platform.</a:t>
+              <a:t>Microsoft Teams was our talk about channel, as well as our meeting platform.</a:t>
             </a:r>
           </a:p>
           <a:p>
@@ -5294,7 +5310,7 @@
           <a:p>
             <a:r>
               <a:rPr lang="en-US" sz="1500" dirty="0"/>
-              <a:t>We used team viewer to share access to a VM for integration testing.</a:t>
+              <a:t>Team viewer granted us the ability to share access to a VM for integration testing.</a:t>
             </a:r>
             <a:endParaRPr lang="en-AU" sz="1500" dirty="0"/>
           </a:p>
@@ -5595,545 +5611,6 @@
     <p:extLst>
       <p:ext uri="{BB962C8B-B14F-4D97-AF65-F5344CB8AC3E}">
         <p14:creationId xmlns:p14="http://schemas.microsoft.com/office/powerpoint/2010/main" val="3738088114"/>
-      </p:ext>
-    </p:extLst>
-  </p:cSld>
-  <p:clrMapOvr>
-    <a:masterClrMapping/>
-  </p:clrMapOvr>
-</p:sld>
-</file>
-
-<file path=ppt/slides/slide4.xml><?xml version="1.0" encoding="utf-8"?>
-<p:sld xmlns:a="http://schemas.openxmlformats.org/drawingml/2006/main" xmlns:r="http://schemas.openxmlformats.org/officeDocument/2006/relationships" xmlns:p="http://schemas.openxmlformats.org/presentationml/2006/main">
-  <p:cSld>
-    <p:spTree>
-      <p:nvGrpSpPr>
-        <p:cNvPr id="1" name=""/>
-        <p:cNvGrpSpPr/>
-        <p:nvPr/>
-      </p:nvGrpSpPr>
-      <p:grpSpPr>
-        <a:xfrm>
-          <a:off x="0" y="0"/>
-          <a:ext cx="0" cy="0"/>
-          <a:chOff x="0" y="0"/>
-          <a:chExt cx="0" cy="0"/>
-        </a:xfrm>
-      </p:grpSpPr>
-      <p:sp>
-        <p:nvSpPr>
-          <p:cNvPr id="2" name="Title 1">
-            <a:extLst>
-              <a:ext uri="{FF2B5EF4-FFF2-40B4-BE49-F238E27FC236}">
-                <a16:creationId xmlns:a16="http://schemas.microsoft.com/office/drawing/2014/main" id="{3C60AE25-4594-9811-3881-31068557E4AE}"/>
-              </a:ext>
-            </a:extLst>
-          </p:cNvPr>
-          <p:cNvSpPr>
-            <a:spLocks noGrp="1"/>
-          </p:cNvSpPr>
-          <p:nvPr>
-            <p:ph type="title"/>
-          </p:nvPr>
-        </p:nvSpPr>
-        <p:spPr/>
-        <p:txBody>
-          <a:bodyPr/>
-          <a:lstStyle/>
-          <a:p>
-            <a:r>
-              <a:rPr lang="en-US" dirty="0"/>
-              <a:t>Obstacles </a:t>
-            </a:r>
-            <a:endParaRPr lang="en-AU" dirty="0"/>
-          </a:p>
-        </p:txBody>
-      </p:sp>
-      <p:sp>
-        <p:nvSpPr>
-          <p:cNvPr id="3" name="Content Placeholder 2">
-            <a:extLst>
-              <a:ext uri="{FF2B5EF4-FFF2-40B4-BE49-F238E27FC236}">
-                <a16:creationId xmlns:a16="http://schemas.microsoft.com/office/drawing/2014/main" id="{4003CD52-8AC9-8819-57B5-8E18C1FA6C48}"/>
-              </a:ext>
-            </a:extLst>
-          </p:cNvPr>
-          <p:cNvSpPr>
-            <a:spLocks noGrp="1"/>
-          </p:cNvSpPr>
-          <p:nvPr>
-            <p:ph idx="1"/>
-          </p:nvPr>
-        </p:nvSpPr>
-        <p:spPr/>
-        <p:txBody>
-          <a:bodyPr/>
-          <a:lstStyle/>
-          <a:p>
-            <a:r>
-              <a:rPr lang="en-US" dirty="0"/>
-              <a:t>Time</a:t>
-            </a:r>
-          </a:p>
-          <a:p>
-            <a:r>
-              <a:rPr lang="en-US" dirty="0"/>
-              <a:t>Virtual Machine test Environment.</a:t>
-            </a:r>
-          </a:p>
-          <a:p>
-            <a:endParaRPr lang="en-US" dirty="0"/>
-          </a:p>
-          <a:p>
-            <a:endParaRPr lang="en-US" dirty="0"/>
-          </a:p>
-        </p:txBody>
-      </p:sp>
-    </p:spTree>
-    <p:extLst>
-      <p:ext uri="{BB962C8B-B14F-4D97-AF65-F5344CB8AC3E}">
-        <p14:creationId xmlns:p14="http://schemas.microsoft.com/office/powerpoint/2010/main" val="3035286301"/>
-      </p:ext>
-    </p:extLst>
-  </p:cSld>
-  <p:clrMapOvr>
-    <a:masterClrMapping/>
-  </p:clrMapOvr>
-</p:sld>
-</file>
-
-<file path=ppt/slides/slide5.xml><?xml version="1.0" encoding="utf-8"?>
-<p:sld xmlns:a="http://schemas.openxmlformats.org/drawingml/2006/main" xmlns:r="http://schemas.openxmlformats.org/officeDocument/2006/relationships" xmlns:p="http://schemas.openxmlformats.org/presentationml/2006/main">
-  <p:cSld>
-    <p:spTree>
-      <p:nvGrpSpPr>
-        <p:cNvPr id="1" name=""/>
-        <p:cNvGrpSpPr/>
-        <p:nvPr/>
-      </p:nvGrpSpPr>
-      <p:grpSpPr>
-        <a:xfrm>
-          <a:off x="0" y="0"/>
-          <a:ext cx="0" cy="0"/>
-          <a:chOff x="0" y="0"/>
-          <a:chExt cx="0" cy="0"/>
-        </a:xfrm>
-      </p:grpSpPr>
-      <p:sp>
-        <p:nvSpPr>
-          <p:cNvPr id="2" name="Title 1">
-            <a:extLst>
-              <a:ext uri="{FF2B5EF4-FFF2-40B4-BE49-F238E27FC236}">
-                <a16:creationId xmlns:a16="http://schemas.microsoft.com/office/drawing/2014/main" id="{FE139BE3-30DA-5011-18D4-32D586A10EDD}"/>
-              </a:ext>
-            </a:extLst>
-          </p:cNvPr>
-          <p:cNvSpPr>
-            <a:spLocks noGrp="1"/>
-          </p:cNvSpPr>
-          <p:nvPr>
-            <p:ph type="title"/>
-          </p:nvPr>
-        </p:nvSpPr>
-        <p:spPr/>
-        <p:txBody>
-          <a:bodyPr/>
-          <a:lstStyle/>
-          <a:p>
-            <a:r>
-              <a:rPr lang="en-US" dirty="0" err="1"/>
-              <a:t>TestWDAC</a:t>
-            </a:r>
-            <a:r>
-              <a:rPr lang="en-US" dirty="0"/>
-              <a:t>()</a:t>
-            </a:r>
-            <a:endParaRPr lang="en-AU" dirty="0"/>
-          </a:p>
-        </p:txBody>
-      </p:sp>
-      <p:sp>
-        <p:nvSpPr>
-          <p:cNvPr id="3" name="Content Placeholder 2">
-            <a:extLst>
-              <a:ext uri="{FF2B5EF4-FFF2-40B4-BE49-F238E27FC236}">
-                <a16:creationId xmlns:a16="http://schemas.microsoft.com/office/drawing/2014/main" id="{C8A9C6DC-1309-1A79-8B4D-C7A38629D659}"/>
-              </a:ext>
-            </a:extLst>
-          </p:cNvPr>
-          <p:cNvSpPr>
-            <a:spLocks noGrp="1"/>
-          </p:cNvSpPr>
-          <p:nvPr>
-            <p:ph idx="1"/>
-          </p:nvPr>
-        </p:nvSpPr>
-        <p:spPr/>
-        <p:txBody>
-          <a:bodyPr/>
-          <a:lstStyle/>
-          <a:p>
-            <a:endParaRPr lang="en-AU"/>
-          </a:p>
-        </p:txBody>
-      </p:sp>
-    </p:spTree>
-    <p:extLst>
-      <p:ext uri="{BB962C8B-B14F-4D97-AF65-F5344CB8AC3E}">
-        <p14:creationId xmlns:p14="http://schemas.microsoft.com/office/powerpoint/2010/main" val="996890133"/>
-      </p:ext>
-    </p:extLst>
-  </p:cSld>
-  <p:clrMapOvr>
-    <a:masterClrMapping/>
-  </p:clrMapOvr>
-</p:sld>
-</file>
-
-<file path=ppt/slides/slide6.xml><?xml version="1.0" encoding="utf-8"?>
-<p:sld xmlns:a="http://schemas.openxmlformats.org/drawingml/2006/main" xmlns:r="http://schemas.openxmlformats.org/officeDocument/2006/relationships" xmlns:p="http://schemas.openxmlformats.org/presentationml/2006/main">
-  <p:cSld>
-    <p:spTree>
-      <p:nvGrpSpPr>
-        <p:cNvPr id="1" name=""/>
-        <p:cNvGrpSpPr/>
-        <p:nvPr/>
-      </p:nvGrpSpPr>
-      <p:grpSpPr>
-        <a:xfrm>
-          <a:off x="0" y="0"/>
-          <a:ext cx="0" cy="0"/>
-          <a:chOff x="0" y="0"/>
-          <a:chExt cx="0" cy="0"/>
-        </a:xfrm>
-      </p:grpSpPr>
-      <p:sp>
-        <p:nvSpPr>
-          <p:cNvPr id="2" name="Title 1">
-            <a:extLst>
-              <a:ext uri="{FF2B5EF4-FFF2-40B4-BE49-F238E27FC236}">
-                <a16:creationId xmlns:a16="http://schemas.microsoft.com/office/drawing/2014/main" id="{81324514-B9CB-AF0B-3C6D-D1EBA2823D92}"/>
-              </a:ext>
-            </a:extLst>
-          </p:cNvPr>
-          <p:cNvSpPr>
-            <a:spLocks noGrp="1"/>
-          </p:cNvSpPr>
-          <p:nvPr>
-            <p:ph type="title"/>
-          </p:nvPr>
-        </p:nvSpPr>
-        <p:spPr/>
-        <p:txBody>
-          <a:bodyPr/>
-          <a:lstStyle/>
-          <a:p>
-            <a:r>
-              <a:rPr lang="en-US" sz="4400" dirty="0" err="1"/>
-              <a:t>setupWDAC</a:t>
-            </a:r>
-            <a:r>
-              <a:rPr lang="en-US" sz="4400" dirty="0"/>
-              <a:t>()</a:t>
-            </a:r>
-            <a:endParaRPr lang="en-AU" dirty="0"/>
-          </a:p>
-        </p:txBody>
-      </p:sp>
-      <p:sp>
-        <p:nvSpPr>
-          <p:cNvPr id="3" name="Content Placeholder 2">
-            <a:extLst>
-              <a:ext uri="{FF2B5EF4-FFF2-40B4-BE49-F238E27FC236}">
-                <a16:creationId xmlns:a16="http://schemas.microsoft.com/office/drawing/2014/main" id="{644DB0E5-5B36-FDBF-AB03-026213A6DDE0}"/>
-              </a:ext>
-            </a:extLst>
-          </p:cNvPr>
-          <p:cNvSpPr>
-            <a:spLocks noGrp="1"/>
-          </p:cNvSpPr>
-          <p:nvPr>
-            <p:ph idx="1"/>
-          </p:nvPr>
-        </p:nvSpPr>
-        <p:spPr/>
-        <p:txBody>
-          <a:bodyPr/>
-          <a:lstStyle/>
-          <a:p>
-            <a:endParaRPr lang="en-AU" dirty="0"/>
-          </a:p>
-        </p:txBody>
-      </p:sp>
-    </p:spTree>
-    <p:extLst>
-      <p:ext uri="{BB962C8B-B14F-4D97-AF65-F5344CB8AC3E}">
-        <p14:creationId xmlns:p14="http://schemas.microsoft.com/office/powerpoint/2010/main" val="691685336"/>
-      </p:ext>
-    </p:extLst>
-  </p:cSld>
-  <p:clrMapOvr>
-    <a:masterClrMapping/>
-  </p:clrMapOvr>
-</p:sld>
-</file>
-
-<file path=ppt/slides/slide7.xml><?xml version="1.0" encoding="utf-8"?>
-<p:sld xmlns:a="http://schemas.openxmlformats.org/drawingml/2006/main" xmlns:r="http://schemas.openxmlformats.org/officeDocument/2006/relationships" xmlns:p="http://schemas.openxmlformats.org/presentationml/2006/main">
-  <p:cSld>
-    <p:spTree>
-      <p:nvGrpSpPr>
-        <p:cNvPr id="1" name=""/>
-        <p:cNvGrpSpPr/>
-        <p:nvPr/>
-      </p:nvGrpSpPr>
-      <p:grpSpPr>
-        <a:xfrm>
-          <a:off x="0" y="0"/>
-          <a:ext cx="0" cy="0"/>
-          <a:chOff x="0" y="0"/>
-          <a:chExt cx="0" cy="0"/>
-        </a:xfrm>
-      </p:grpSpPr>
-      <p:sp>
-        <p:nvSpPr>
-          <p:cNvPr id="2" name="Title 1">
-            <a:extLst>
-              <a:ext uri="{FF2B5EF4-FFF2-40B4-BE49-F238E27FC236}">
-                <a16:creationId xmlns:a16="http://schemas.microsoft.com/office/drawing/2014/main" id="{5947227B-19E7-3DE2-7386-7F37313C2667}"/>
-              </a:ext>
-            </a:extLst>
-          </p:cNvPr>
-          <p:cNvSpPr>
-            <a:spLocks noGrp="1"/>
-          </p:cNvSpPr>
-          <p:nvPr>
-            <p:ph type="title"/>
-          </p:nvPr>
-        </p:nvSpPr>
-        <p:spPr/>
-        <p:txBody>
-          <a:bodyPr/>
-          <a:lstStyle/>
-          <a:p>
-            <a:r>
-              <a:rPr lang="en-US" sz="4400" dirty="0" err="1"/>
-              <a:t>enableWDAC</a:t>
-            </a:r>
-            <a:r>
-              <a:rPr lang="en-US" sz="4400" dirty="0"/>
-              <a:t>()</a:t>
-            </a:r>
-            <a:endParaRPr lang="en-AU" dirty="0"/>
-          </a:p>
-        </p:txBody>
-      </p:sp>
-      <p:sp>
-        <p:nvSpPr>
-          <p:cNvPr id="3" name="Content Placeholder 2">
-            <a:extLst>
-              <a:ext uri="{FF2B5EF4-FFF2-40B4-BE49-F238E27FC236}">
-                <a16:creationId xmlns:a16="http://schemas.microsoft.com/office/drawing/2014/main" id="{A416DA9C-B0C9-98B5-BE41-0A7CFCF5942F}"/>
-              </a:ext>
-            </a:extLst>
-          </p:cNvPr>
-          <p:cNvSpPr>
-            <a:spLocks noGrp="1"/>
-          </p:cNvSpPr>
-          <p:nvPr>
-            <p:ph idx="1"/>
-          </p:nvPr>
-        </p:nvSpPr>
-        <p:spPr/>
-        <p:txBody>
-          <a:bodyPr/>
-          <a:lstStyle/>
-          <a:p>
-            <a:endParaRPr lang="en-AU"/>
-          </a:p>
-        </p:txBody>
-      </p:sp>
-    </p:spTree>
-    <p:extLst>
-      <p:ext uri="{BB962C8B-B14F-4D97-AF65-F5344CB8AC3E}">
-        <p14:creationId xmlns:p14="http://schemas.microsoft.com/office/powerpoint/2010/main" val="1594782237"/>
-      </p:ext>
-    </p:extLst>
-  </p:cSld>
-  <p:clrMapOvr>
-    <a:masterClrMapping/>
-  </p:clrMapOvr>
-</p:sld>
-</file>
-
-<file path=ppt/slides/slide8.xml><?xml version="1.0" encoding="utf-8"?>
-<p:sld xmlns:a="http://schemas.openxmlformats.org/drawingml/2006/main" xmlns:r="http://schemas.openxmlformats.org/officeDocument/2006/relationships" xmlns:p="http://schemas.openxmlformats.org/presentationml/2006/main">
-  <p:cSld>
-    <p:spTree>
-      <p:nvGrpSpPr>
-        <p:cNvPr id="1" name=""/>
-        <p:cNvGrpSpPr/>
-        <p:nvPr/>
-      </p:nvGrpSpPr>
-      <p:grpSpPr>
-        <a:xfrm>
-          <a:off x="0" y="0"/>
-          <a:ext cx="0" cy="0"/>
-          <a:chOff x="0" y="0"/>
-          <a:chExt cx="0" cy="0"/>
-        </a:xfrm>
-      </p:grpSpPr>
-      <p:sp>
-        <p:nvSpPr>
-          <p:cNvPr id="2" name="Title 1">
-            <a:extLst>
-              <a:ext uri="{FF2B5EF4-FFF2-40B4-BE49-F238E27FC236}">
-                <a16:creationId xmlns:a16="http://schemas.microsoft.com/office/drawing/2014/main" id="{251F01AB-181D-E057-DD7A-5851BC1836E1}"/>
-              </a:ext>
-            </a:extLst>
-          </p:cNvPr>
-          <p:cNvSpPr>
-            <a:spLocks noGrp="1"/>
-          </p:cNvSpPr>
-          <p:nvPr>
-            <p:ph type="title"/>
-          </p:nvPr>
-        </p:nvSpPr>
-        <p:spPr/>
-        <p:txBody>
-          <a:bodyPr/>
-          <a:lstStyle/>
-          <a:p>
-            <a:r>
-              <a:rPr lang="en-US" sz="4400" dirty="0" err="1"/>
-              <a:t>resetWDAC</a:t>
-            </a:r>
-            <a:r>
-              <a:rPr lang="en-US" sz="4400" dirty="0"/>
-              <a:t>()</a:t>
-            </a:r>
-            <a:endParaRPr lang="en-AU" dirty="0"/>
-          </a:p>
-        </p:txBody>
-      </p:sp>
-      <p:sp>
-        <p:nvSpPr>
-          <p:cNvPr id="3" name="Content Placeholder 2">
-            <a:extLst>
-              <a:ext uri="{FF2B5EF4-FFF2-40B4-BE49-F238E27FC236}">
-                <a16:creationId xmlns:a16="http://schemas.microsoft.com/office/drawing/2014/main" id="{D68E6C09-F229-BB1D-6ECE-8C9B66DC772C}"/>
-              </a:ext>
-            </a:extLst>
-          </p:cNvPr>
-          <p:cNvSpPr>
-            <a:spLocks noGrp="1"/>
-          </p:cNvSpPr>
-          <p:nvPr>
-            <p:ph idx="1"/>
-          </p:nvPr>
-        </p:nvSpPr>
-        <p:spPr/>
-        <p:txBody>
-          <a:bodyPr/>
-          <a:lstStyle/>
-          <a:p>
-            <a:endParaRPr lang="en-AU"/>
-          </a:p>
-        </p:txBody>
-      </p:sp>
-    </p:spTree>
-    <p:extLst>
-      <p:ext uri="{BB962C8B-B14F-4D97-AF65-F5344CB8AC3E}">
-        <p14:creationId xmlns:p14="http://schemas.microsoft.com/office/powerpoint/2010/main" val="1356853145"/>
-      </p:ext>
-    </p:extLst>
-  </p:cSld>
-  <p:clrMapOvr>
-    <a:masterClrMapping/>
-  </p:clrMapOvr>
-</p:sld>
-</file>
-
-<file path=ppt/slides/slide9.xml><?xml version="1.0" encoding="utf-8"?>
-<p:sld xmlns:a="http://schemas.openxmlformats.org/drawingml/2006/main" xmlns:r="http://schemas.openxmlformats.org/officeDocument/2006/relationships" xmlns:p="http://schemas.openxmlformats.org/presentationml/2006/main">
-  <p:cSld>
-    <p:spTree>
-      <p:nvGrpSpPr>
-        <p:cNvPr id="1" name=""/>
-        <p:cNvGrpSpPr/>
-        <p:nvPr/>
-      </p:nvGrpSpPr>
-      <p:grpSpPr>
-        <a:xfrm>
-          <a:off x="0" y="0"/>
-          <a:ext cx="0" cy="0"/>
-          <a:chOff x="0" y="0"/>
-          <a:chExt cx="0" cy="0"/>
-        </a:xfrm>
-      </p:grpSpPr>
-      <p:sp>
-        <p:nvSpPr>
-          <p:cNvPr id="2" name="Title 1">
-            <a:extLst>
-              <a:ext uri="{FF2B5EF4-FFF2-40B4-BE49-F238E27FC236}">
-                <a16:creationId xmlns:a16="http://schemas.microsoft.com/office/drawing/2014/main" id="{2A57C4C7-B87A-417D-44B4-90A72FA8AC23}"/>
-              </a:ext>
-            </a:extLst>
-          </p:cNvPr>
-          <p:cNvSpPr>
-            <a:spLocks noGrp="1"/>
-          </p:cNvSpPr>
-          <p:nvPr>
-            <p:ph type="title"/>
-          </p:nvPr>
-        </p:nvSpPr>
-        <p:spPr/>
-        <p:txBody>
-          <a:bodyPr/>
-          <a:lstStyle/>
-          <a:p>
-            <a:r>
-              <a:rPr lang="en-US" dirty="0"/>
-              <a:t>Implementation </a:t>
-            </a:r>
-            <a:r>
-              <a:rPr lang="en-US" dirty="0" err="1"/>
-              <a:t>Tetsting</a:t>
-            </a:r>
-            <a:endParaRPr lang="en-AU" dirty="0"/>
-          </a:p>
-        </p:txBody>
-      </p:sp>
-      <p:sp>
-        <p:nvSpPr>
-          <p:cNvPr id="3" name="Content Placeholder 2">
-            <a:extLst>
-              <a:ext uri="{FF2B5EF4-FFF2-40B4-BE49-F238E27FC236}">
-                <a16:creationId xmlns:a16="http://schemas.microsoft.com/office/drawing/2014/main" id="{0657674D-48A9-E03A-459A-60DFD2DD9A0E}"/>
-              </a:ext>
-            </a:extLst>
-          </p:cNvPr>
-          <p:cNvSpPr>
-            <a:spLocks noGrp="1"/>
-          </p:cNvSpPr>
-          <p:nvPr>
-            <p:ph idx="1"/>
-          </p:nvPr>
-        </p:nvSpPr>
-        <p:spPr/>
-        <p:txBody>
-          <a:bodyPr/>
-          <a:lstStyle/>
-          <a:p>
-            <a:endParaRPr lang="en-AU"/>
-          </a:p>
-        </p:txBody>
-      </p:sp>
-    </p:spTree>
-    <p:extLst>
-      <p:ext uri="{BB962C8B-B14F-4D97-AF65-F5344CB8AC3E}">
-        <p14:creationId xmlns:p14="http://schemas.microsoft.com/office/powerpoint/2010/main" val="862906537"/>
       </p:ext>
     </p:extLst>
   </p:cSld>
